--- a/exports/pptx/lessons/senior-module-05-dot-addition/day-06-historicity.pptx
+++ b/exports/pptx/lessons/senior-module-05-dot-addition/day-06-historicity.pptx
@@ -15,9 +15,13 @@
     <p:sldId id="263" r:id="rId9"/>
     <p:sldId id="264" r:id="rId10"/>
     <p:sldId id="265" r:id="rId11"/>
+    <p:sldId id="266" r:id="rId12"/>
+    <p:sldId id="267" r:id="rId13"/>
+    <p:sldId id="268" r:id="rId14"/>
+    <p:sldId id="269" r:id="rId15"/>
   </p:sldIdLst>
   <p:notesMasterIdLst>
-    <p:notesMasterId r:id="rId12"/>
+    <p:notesMasterId r:id="rId16"/>
   </p:notesMasterIdLst>
   <p:sldSz cx="9144000" cy="5143500"/>
   <p:notesSz cx="5143500" cy="9144000"/>
@@ -623,6 +627,358 @@
             <a:fld id="{F7021451-1387-4CA6-816F-3879F97B5CBC}" type="slidenum">
               <a:rPr lang="en-US"/>
               <a:t>10</a:t>
+            </a:fld>
+            <a:endParaRPr lang="en-US"/>
+          </a:p>
+        </p:txBody>
+      </p:sp>
+    </p:spTree>
+    <p:extLst>
+      <p:ext uri="{BB962C8B-B14F-4D97-AF65-F5344CB8AC3E}">
+        <p14:creationId xmlns:p14="http://schemas.microsoft.com/office/powerpoint/2010/main" val="1024086991"/>
+      </p:ext>
+    </p:extLst>
+  </p:cSld>
+  <p:clrMapOvr>
+    <a:masterClrMapping/>
+  </p:clrMapOvr>
+</p:notes>
+</file>
+
+<file path=ppt/notesSlides/notesSlide11.xml><?xml version="1.0" encoding="utf-8"?>
+<p:notes xmlns:a="http://schemas.openxmlformats.org/drawingml/2006/main" xmlns:r="http://schemas.openxmlformats.org/officeDocument/2006/relationships" xmlns:p="http://schemas.openxmlformats.org/presentationml/2006/main">
+  <p:cSld>
+    <p:spTree>
+      <p:nvGrpSpPr>
+        <p:cNvPr id="1" name=""/>
+        <p:cNvGrpSpPr/>
+        <p:nvPr/>
+      </p:nvGrpSpPr>
+      <p:grpSpPr>
+        <a:xfrm>
+          <a:off x="0" y="0"/>
+          <a:ext cx="0" cy="0"/>
+          <a:chOff x="0" y="0"/>
+          <a:chExt cx="0" cy="0"/>
+        </a:xfrm>
+      </p:grpSpPr>
+      <p:sp>
+        <p:nvSpPr>
+          <p:cNvPr id="2" name="Slide Image Placeholder 1"/>
+          <p:cNvSpPr>
+            <a:spLocks noGrp="1" noRot="1" noChangeAspect="1"/>
+          </p:cNvSpPr>
+          <p:nvPr>
+            <p:ph type="sldImg"/>
+          </p:nvPr>
+        </p:nvSpPr>
+        <p:spPr/>
+      </p:sp>
+      <p:sp>
+        <p:nvSpPr>
+          <p:cNvPr id="3" name="Notes Placeholder 2"/>
+          <p:cNvSpPr>
+            <a:spLocks noGrp="1"/>
+          </p:cNvSpPr>
+          <p:nvPr>
+            <p:ph type="body" idx="1"/>
+          </p:nvPr>
+        </p:nvSpPr>
+        <p:spPr/>
+        <p:txBody>
+          <a:bodyPr/>
+          <a:lstStyle/>
+          <a:p>
+            <a:r>
+              <a:rPr lang="en-US" dirty="0"/>
+              <a:t/>
+            </a:r>
+            <a:endParaRPr lang="en-US" dirty="0"/>
+          </a:p>
+        </p:txBody>
+      </p:sp>
+      <p:sp>
+        <p:nvSpPr>
+          <p:cNvPr id="4" name="Slide Number Placeholder 3"/>
+          <p:cNvSpPr>
+            <a:spLocks noGrp="1"/>
+          </p:cNvSpPr>
+          <p:nvPr>
+            <p:ph type="sldNum" sz="quarter" idx="10"/>
+          </p:nvPr>
+        </p:nvSpPr>
+        <p:spPr/>
+        <p:txBody>
+          <a:bodyPr/>
+          <a:lstStyle/>
+          <a:p>
+            <a:fld id="{F7021451-1387-4CA6-816F-3879F97B5CBC}" type="slidenum">
+              <a:rPr lang="en-US"/>
+              <a:t>11</a:t>
+            </a:fld>
+            <a:endParaRPr lang="en-US"/>
+          </a:p>
+        </p:txBody>
+      </p:sp>
+    </p:spTree>
+    <p:extLst>
+      <p:ext uri="{BB962C8B-B14F-4D97-AF65-F5344CB8AC3E}">
+        <p14:creationId xmlns:p14="http://schemas.microsoft.com/office/powerpoint/2010/main" val="1024086991"/>
+      </p:ext>
+    </p:extLst>
+  </p:cSld>
+  <p:clrMapOvr>
+    <a:masterClrMapping/>
+  </p:clrMapOvr>
+</p:notes>
+</file>
+
+<file path=ppt/notesSlides/notesSlide12.xml><?xml version="1.0" encoding="utf-8"?>
+<p:notes xmlns:a="http://schemas.openxmlformats.org/drawingml/2006/main" xmlns:r="http://schemas.openxmlformats.org/officeDocument/2006/relationships" xmlns:p="http://schemas.openxmlformats.org/presentationml/2006/main">
+  <p:cSld>
+    <p:spTree>
+      <p:nvGrpSpPr>
+        <p:cNvPr id="1" name=""/>
+        <p:cNvGrpSpPr/>
+        <p:nvPr/>
+      </p:nvGrpSpPr>
+      <p:grpSpPr>
+        <a:xfrm>
+          <a:off x="0" y="0"/>
+          <a:ext cx="0" cy="0"/>
+          <a:chOff x="0" y="0"/>
+          <a:chExt cx="0" cy="0"/>
+        </a:xfrm>
+      </p:grpSpPr>
+      <p:sp>
+        <p:nvSpPr>
+          <p:cNvPr id="2" name="Slide Image Placeholder 1"/>
+          <p:cNvSpPr>
+            <a:spLocks noGrp="1" noRot="1" noChangeAspect="1"/>
+          </p:cNvSpPr>
+          <p:nvPr>
+            <p:ph type="sldImg"/>
+          </p:nvPr>
+        </p:nvSpPr>
+        <p:spPr/>
+      </p:sp>
+      <p:sp>
+        <p:nvSpPr>
+          <p:cNvPr id="3" name="Notes Placeholder 2"/>
+          <p:cNvSpPr>
+            <a:spLocks noGrp="1"/>
+          </p:cNvSpPr>
+          <p:nvPr>
+            <p:ph type="body" idx="1"/>
+          </p:nvPr>
+        </p:nvSpPr>
+        <p:spPr/>
+        <p:txBody>
+          <a:bodyPr/>
+          <a:lstStyle/>
+          <a:p>
+            <a:r>
+              <a:rPr lang="en-US" dirty="0"/>
+              <a:t/>
+            </a:r>
+            <a:endParaRPr lang="en-US" dirty="0"/>
+          </a:p>
+        </p:txBody>
+      </p:sp>
+      <p:sp>
+        <p:nvSpPr>
+          <p:cNvPr id="4" name="Slide Number Placeholder 3"/>
+          <p:cNvSpPr>
+            <a:spLocks noGrp="1"/>
+          </p:cNvSpPr>
+          <p:nvPr>
+            <p:ph type="sldNum" sz="quarter" idx="10"/>
+          </p:nvPr>
+        </p:nvSpPr>
+        <p:spPr/>
+        <p:txBody>
+          <a:bodyPr/>
+          <a:lstStyle/>
+          <a:p>
+            <a:fld id="{F7021451-1387-4CA6-816F-3879F97B5CBC}" type="slidenum">
+              <a:rPr lang="en-US"/>
+              <a:t>12</a:t>
+            </a:fld>
+            <a:endParaRPr lang="en-US"/>
+          </a:p>
+        </p:txBody>
+      </p:sp>
+    </p:spTree>
+    <p:extLst>
+      <p:ext uri="{BB962C8B-B14F-4D97-AF65-F5344CB8AC3E}">
+        <p14:creationId xmlns:p14="http://schemas.microsoft.com/office/powerpoint/2010/main" val="1024086991"/>
+      </p:ext>
+    </p:extLst>
+  </p:cSld>
+  <p:clrMapOvr>
+    <a:masterClrMapping/>
+  </p:clrMapOvr>
+</p:notes>
+</file>
+
+<file path=ppt/notesSlides/notesSlide13.xml><?xml version="1.0" encoding="utf-8"?>
+<p:notes xmlns:a="http://schemas.openxmlformats.org/drawingml/2006/main" xmlns:r="http://schemas.openxmlformats.org/officeDocument/2006/relationships" xmlns:p="http://schemas.openxmlformats.org/presentationml/2006/main">
+  <p:cSld>
+    <p:spTree>
+      <p:nvGrpSpPr>
+        <p:cNvPr id="1" name=""/>
+        <p:cNvGrpSpPr/>
+        <p:nvPr/>
+      </p:nvGrpSpPr>
+      <p:grpSpPr>
+        <a:xfrm>
+          <a:off x="0" y="0"/>
+          <a:ext cx="0" cy="0"/>
+          <a:chOff x="0" y="0"/>
+          <a:chExt cx="0" cy="0"/>
+        </a:xfrm>
+      </p:grpSpPr>
+      <p:sp>
+        <p:nvSpPr>
+          <p:cNvPr id="2" name="Slide Image Placeholder 1"/>
+          <p:cNvSpPr>
+            <a:spLocks noGrp="1" noRot="1" noChangeAspect="1"/>
+          </p:cNvSpPr>
+          <p:nvPr>
+            <p:ph type="sldImg"/>
+          </p:nvPr>
+        </p:nvSpPr>
+        <p:spPr/>
+      </p:sp>
+      <p:sp>
+        <p:nvSpPr>
+          <p:cNvPr id="3" name="Notes Placeholder 2"/>
+          <p:cNvSpPr>
+            <a:spLocks noGrp="1"/>
+          </p:cNvSpPr>
+          <p:nvPr>
+            <p:ph type="body" idx="1"/>
+          </p:nvPr>
+        </p:nvSpPr>
+        <p:spPr/>
+        <p:txBody>
+          <a:bodyPr/>
+          <a:lstStyle/>
+          <a:p>
+            <a:r>
+              <a:rPr lang="en-US" dirty="0"/>
+              <a:t/>
+            </a:r>
+            <a:endParaRPr lang="en-US" dirty="0"/>
+          </a:p>
+        </p:txBody>
+      </p:sp>
+      <p:sp>
+        <p:nvSpPr>
+          <p:cNvPr id="4" name="Slide Number Placeholder 3"/>
+          <p:cNvSpPr>
+            <a:spLocks noGrp="1"/>
+          </p:cNvSpPr>
+          <p:nvPr>
+            <p:ph type="sldNum" sz="quarter" idx="10"/>
+          </p:nvPr>
+        </p:nvSpPr>
+        <p:spPr/>
+        <p:txBody>
+          <a:bodyPr/>
+          <a:lstStyle/>
+          <a:p>
+            <a:fld id="{F7021451-1387-4CA6-816F-3879F97B5CBC}" type="slidenum">
+              <a:rPr lang="en-US"/>
+              <a:t>13</a:t>
+            </a:fld>
+            <a:endParaRPr lang="en-US"/>
+          </a:p>
+        </p:txBody>
+      </p:sp>
+    </p:spTree>
+    <p:extLst>
+      <p:ext uri="{BB962C8B-B14F-4D97-AF65-F5344CB8AC3E}">
+        <p14:creationId xmlns:p14="http://schemas.microsoft.com/office/powerpoint/2010/main" val="1024086991"/>
+      </p:ext>
+    </p:extLst>
+  </p:cSld>
+  <p:clrMapOvr>
+    <a:masterClrMapping/>
+  </p:clrMapOvr>
+</p:notes>
+</file>
+
+<file path=ppt/notesSlides/notesSlide14.xml><?xml version="1.0" encoding="utf-8"?>
+<p:notes xmlns:a="http://schemas.openxmlformats.org/drawingml/2006/main" xmlns:r="http://schemas.openxmlformats.org/officeDocument/2006/relationships" xmlns:p="http://schemas.openxmlformats.org/presentationml/2006/main">
+  <p:cSld>
+    <p:spTree>
+      <p:nvGrpSpPr>
+        <p:cNvPr id="1" name=""/>
+        <p:cNvGrpSpPr/>
+        <p:nvPr/>
+      </p:nvGrpSpPr>
+      <p:grpSpPr>
+        <a:xfrm>
+          <a:off x="0" y="0"/>
+          <a:ext cx="0" cy="0"/>
+          <a:chOff x="0" y="0"/>
+          <a:chExt cx="0" cy="0"/>
+        </a:xfrm>
+      </p:grpSpPr>
+      <p:sp>
+        <p:nvSpPr>
+          <p:cNvPr id="2" name="Slide Image Placeholder 1"/>
+          <p:cNvSpPr>
+            <a:spLocks noGrp="1" noRot="1" noChangeAspect="1"/>
+          </p:cNvSpPr>
+          <p:nvPr>
+            <p:ph type="sldImg"/>
+          </p:nvPr>
+        </p:nvSpPr>
+        <p:spPr/>
+      </p:sp>
+      <p:sp>
+        <p:nvSpPr>
+          <p:cNvPr id="3" name="Notes Placeholder 2"/>
+          <p:cNvSpPr>
+            <a:spLocks noGrp="1"/>
+          </p:cNvSpPr>
+          <p:nvPr>
+            <p:ph type="body" idx="1"/>
+          </p:nvPr>
+        </p:nvSpPr>
+        <p:spPr/>
+        <p:txBody>
+          <a:bodyPr/>
+          <a:lstStyle/>
+          <a:p>
+            <a:r>
+              <a:rPr lang="en-US" dirty="0"/>
+              <a:t/>
+            </a:r>
+            <a:endParaRPr lang="en-US" dirty="0"/>
+          </a:p>
+        </p:txBody>
+      </p:sp>
+      <p:sp>
+        <p:nvSpPr>
+          <p:cNvPr id="4" name="Slide Number Placeholder 3"/>
+          <p:cNvSpPr>
+            <a:spLocks noGrp="1"/>
+          </p:cNvSpPr>
+          <p:nvPr>
+            <p:ph type="sldNum" sz="quarter" idx="10"/>
+          </p:nvPr>
+        </p:nvSpPr>
+        <p:spPr/>
+        <p:txBody>
+          <a:bodyPr/>
+          <a:lstStyle/>
+          <a:p>
+            <a:fld id="{F7021451-1387-4CA6-816F-3879F97B5CBC}" type="slidenum">
+              <a:rPr lang="en-US"/>
+              <a:t>14</a:t>
             </a:fld>
             <a:endParaRPr lang="en-US"/>
           </a:p>
@@ -1876,102 +2232,6 @@
         </p:nvSpPr>
         <p:spPr>
           <a:xfrm>
-            <a:off x="406301" y="1223963"/>
-            <a:ext cx="8498026" cy="274290"/>
-          </a:xfrm>
-          <a:prstGeom prst="rect">
-            <a:avLst/>
-          </a:prstGeom>
-          <a:noFill/>
-          <a:ln/>
-        </p:spPr>
-        <p:txBody>
-          <a:bodyPr wrap="square" lIns="0" tIns="0" rIns="0" bIns="0" rtlCol="0" anchor="t"/>
-          <a:lstStyle/>
-          <a:p>
-            <a:pPr algn="l" indent="0" marL="0">
-              <a:lnSpc>
-                <a:spcPts val="2160"/>
-              </a:lnSpc>
-              <a:spcBef>
-                <a:spcPts val="600"/>
-              </a:spcBef>
-              <a:spcAft>
-                <a:spcPts val="800"/>
-              </a:spcAft>
-              <a:buNone/>
-            </a:pPr>
-            <a:r>
-              <a:rPr lang="en-US" sz="1800" b="1" dirty="0">
-                <a:solidFill>
-                  <a:srgbClr val="997929"/>
-                </a:solidFill>
-                <a:latin typeface="Times New Roman" pitchFamily="34" charset="0"/>
-                <a:ea typeface="Times New Roman" pitchFamily="34" charset="-122"/>
-                <a:cs typeface="Times New Roman" pitchFamily="34" charset="-120"/>
-              </a:rPr>
-              <a:t>Learning objective</a:t>
-            </a:r>
-            <a:endParaRPr lang="en-US" sz="1800" dirty="0"/>
-          </a:p>
-        </p:txBody>
-      </p:sp>
-      <p:sp>
-        <p:nvSpPr>
-          <p:cNvPr id="6" name="Text 4"/>
-          <p:cNvSpPr/>
-          <p:nvPr/>
-        </p:nvSpPr>
-        <p:spPr>
-          <a:xfrm>
-            <a:off x="406301" y="1637854"/>
-            <a:ext cx="8498026" cy="426541"/>
-          </a:xfrm>
-          <a:prstGeom prst="rect">
-            <a:avLst/>
-          </a:prstGeom>
-          <a:noFill/>
-          <a:ln/>
-        </p:spPr>
-        <p:txBody>
-          <a:bodyPr wrap="square" lIns="0" tIns="0" rIns="0" bIns="0" rtlCol="0" anchor="t"/>
-          <a:lstStyle/>
-          <a:p>
-            <a:pPr algn="l" indent="0" marL="0">
-              <a:lnSpc>
-                <a:spcPts val="1680"/>
-              </a:lnSpc>
-              <a:spcBef>
-                <a:spcPts val="300"/>
-              </a:spcBef>
-              <a:spcAft>
-                <a:spcPts val="300"/>
-              </a:spcAft>
-              <a:buNone/>
-            </a:pPr>
-            <a:r>
-              <a:rPr lang="en-US" sz="1200" dirty="0">
-                <a:solidFill>
-                  <a:srgbClr val="1A1A1A"/>
-                </a:solidFill>
-                <a:latin typeface="Georgia" pitchFamily="34" charset="0"/>
-                <a:ea typeface="Georgia" pitchFamily="34" charset="-122"/>
-                <a:cs typeface="Georgia" pitchFamily="34" charset="-120"/>
-              </a:rPr>
-              <a:t>Students read Dani's "Myths and Reality: On Vedic Mathematics" and identify Dani's three main critiques of Tirthaji's provenance claim.</a:t>
-            </a:r>
-            <a:endParaRPr lang="en-US" sz="1200" dirty="0"/>
-          </a:p>
-        </p:txBody>
-      </p:sp>
-      <p:sp>
-        <p:nvSpPr>
-          <p:cNvPr id="7" name="Text 5"/>
-          <p:cNvSpPr/>
-          <p:nvPr/>
-        </p:nvSpPr>
-        <p:spPr>
-          <a:xfrm>
             <a:off x="406301" y="4434929"/>
             <a:ext cx="8498026" cy="213271"/>
           </a:xfrm>
@@ -2116,7 +2376,7 @@
                 <a:ea typeface="Times New Roman" pitchFamily="34" charset="-122"/>
                 <a:cs typeface="Times New Roman" pitchFamily="34" charset="-120"/>
               </a:rPr>
-              <a:t>Citation(s) used</a:t>
+              <a:t>Reading response (7 min)</a:t>
             </a:r>
             <a:endParaRPr lang="en-US" sz="1800" dirty="0"/>
           </a:p>
@@ -2130,8 +2390,8 @@
         </p:nvSpPr>
         <p:spPr>
           <a:xfrm>
-            <a:off x="406301" y="870942"/>
-            <a:ext cx="8498026" cy="213271"/>
+            <a:off x="634901" y="883593"/>
+            <a:ext cx="8102798" cy="487561"/>
           </a:xfrm>
           <a:prstGeom prst="rect">
             <a:avLst/>
@@ -2143,8 +2403,74 @@
           <a:bodyPr wrap="square" lIns="0" tIns="0" rIns="0" bIns="0" rtlCol="0" anchor="t"/>
           <a:lstStyle/>
           <a:p>
+            <a:pPr algn="l" marL="342900" indent="-342900">
+              <a:lnSpc>
+                <a:spcPts val="1620"/>
+              </a:lnSpc>
+              <a:spcAft>
+                <a:spcPts val="300"/>
+              </a:spcAft>
+              <a:buSzPct val="100000"/>
+              <a:buChar char="•"/>
+            </a:pPr>
+            <a:r>
+              <a:rPr lang="en-US" sz="1200" dirty="0">
+                <a:solidFill>
+                  <a:srgbClr val="1A1A1A"/>
+                </a:solidFill>
+                <a:latin typeface="Georgia" pitchFamily="34" charset="0"/>
+                <a:ea typeface="Georgia" pitchFamily="34" charset="-122"/>
+                <a:cs typeface="Georgia" pitchFamily="34" charset="-120"/>
+              </a:rPr>
+              <a:t>Each student writes 1 paragraph (4–5 sentences): </a:t>
+            </a:r>
             <a:pPr algn="l" indent="0" marL="0">
               <a:lnSpc>
+                <a:spcPts val="1620"/>
+              </a:lnSpc>
+              <a:spcAft>
+                <a:spcPts val="300"/>
+              </a:spcAft>
+              <a:buNone/>
+            </a:pPr>
+            <a:r>
+              <a:rPr lang="en-US" sz="1200" i="1" dirty="0">
+                <a:solidFill>
+                  <a:srgbClr val="1A1A1A"/>
+                </a:solidFill>
+                <a:latin typeface="Georgia" pitchFamily="34" charset="0"/>
+                <a:ea typeface="Georgia" pitchFamily="34" charset="-122"/>
+                <a:cs typeface="Georgia" pitchFamily="34" charset="-120"/>
+              </a:rPr>
+              <a:t>"What is your current best position on whether 'Vedic mathematics' is fairly named?"</a:t>
+            </a:r>
+            <a:endParaRPr lang="en-US" sz="1200" dirty="0"/>
+          </a:p>
+        </p:txBody>
+      </p:sp>
+      <p:sp>
+        <p:nvSpPr>
+          <p:cNvPr id="5" name="Text 3"/>
+          <p:cNvSpPr/>
+          <p:nvPr/>
+        </p:nvSpPr>
+        <p:spPr>
+          <a:xfrm>
+            <a:off x="406301" y="4434929"/>
+            <a:ext cx="8498026" cy="213271"/>
+          </a:xfrm>
+          <a:prstGeom prst="rect">
+            <a:avLst/>
+          </a:prstGeom>
+          <a:noFill/>
+          <a:ln/>
+        </p:spPr>
+        <p:txBody>
+          <a:bodyPr wrap="square" lIns="0" tIns="0" rIns="0" bIns="0" rtlCol="0" anchor="t"/>
+          <a:lstStyle/>
+          <a:p>
+            <a:pPr algn="l" indent="0" marL="0">
+              <a:lnSpc>
                 <a:spcPts val="1680"/>
               </a:lnSpc>
               <a:spcBef>
@@ -2164,10 +2490,211 @@
                 <a:ea typeface="Georgia" pitchFamily="34" charset="-122"/>
                 <a:cs typeface="Georgia" pitchFamily="34" charset="-120"/>
               </a:rPr>
-              <a:t>– Dani, S. G. (1993). "Myths and Reality: On Vedic Mathematics." </a:t>
-            </a:r>
+              <a:t>Senior ·  · IKS Curriculum</a:t>
+            </a:r>
+            <a:endParaRPr lang="en-US" sz="1200" dirty="0"/>
+          </a:p>
+        </p:txBody>
+      </p:sp>
+    </p:spTree>
+  </p:cSld>
+  <p:clrMapOvr>
+    <a:masterClrMapping/>
+  </p:clrMapOvr>
+</p:sld>
+</file>
+
+<file path=ppt/slides/slide11.xml><?xml version="1.0" encoding="utf-8"?>
+<p:sld xmlns:a="http://schemas.openxmlformats.org/drawingml/2006/main" xmlns:r="http://schemas.openxmlformats.org/officeDocument/2006/relationships" xmlns:p="http://schemas.openxmlformats.org/presentationml/2006/main">
+  <p:cSld name="Slide 11">
+    <p:bg>
+      <p:bgPr>
+        <a:solidFill>
+          <a:srgbClr val="FAF7F2"/>
+        </a:solidFill>
+      </p:bgPr>
+    </p:bg>
+    <p:spTree>
+      <p:nvGrpSpPr>
+        <p:cNvPr id="1" name=""/>
+        <p:cNvGrpSpPr/>
+        <p:nvPr/>
+      </p:nvGrpSpPr>
+      <p:grpSpPr>
+        <a:xfrm>
+          <a:off x="0" y="0"/>
+          <a:ext cx="0" cy="0"/>
+          <a:chOff x="0" y="0"/>
+          <a:chExt cx="0" cy="0"/>
+        </a:xfrm>
+      </p:grpSpPr>
+      <p:sp>
+        <p:nvSpPr>
+          <p:cNvPr id="2" name="Text 0"/>
+          <p:cNvSpPr/>
+          <p:nvPr/>
+        </p:nvSpPr>
+        <p:spPr>
+          <a:xfrm>
+            <a:off x="0" y="0"/>
+            <a:ext cx="9144000" cy="101501"/>
+          </a:xfrm>
+          <a:prstGeom prst="rect">
+            <a:avLst/>
+          </a:prstGeom>
+          <a:solidFill>
+            <a:srgbClr val="5D1D2E"/>
+          </a:solidFill>
+          <a:ln/>
+        </p:spPr>
+        <p:txBody>
+          <a:bodyPr wrap="square" rtlCol="0" anchor="ctr"/>
+          <a:lstStyle/>
+          <a:p>
+            <a:pPr indent="0" marL="0">
+              <a:buNone/>
+            </a:pPr>
+            <a:endParaRPr lang="en-US" dirty="0"/>
+          </a:p>
+        </p:txBody>
+      </p:sp>
+      <p:sp>
+        <p:nvSpPr>
+          <p:cNvPr id="3" name="Text 1"/>
+          <p:cNvSpPr/>
+          <p:nvPr/>
+        </p:nvSpPr>
+        <p:spPr>
+          <a:xfrm>
+            <a:off x="406301" y="457051"/>
+            <a:ext cx="8498026" cy="274290"/>
+          </a:xfrm>
+          <a:prstGeom prst="rect">
+            <a:avLst/>
+          </a:prstGeom>
+          <a:noFill/>
+          <a:ln/>
+        </p:spPr>
+        <p:txBody>
+          <a:bodyPr wrap="square" lIns="0" tIns="0" rIns="0" bIns="0" rtlCol="0" anchor="t"/>
+          <a:lstStyle/>
+          <a:p>
             <a:pPr algn="l" indent="0" marL="0">
               <a:lnSpc>
+                <a:spcPts val="2160"/>
+              </a:lnSpc>
+              <a:spcBef>
+                <a:spcPts val="600"/>
+              </a:spcBef>
+              <a:spcAft>
+                <a:spcPts val="800"/>
+              </a:spcAft>
+              <a:buNone/>
+            </a:pPr>
+            <a:r>
+              <a:rPr lang="en-US" sz="1800" b="1" dirty="0">
+                <a:solidFill>
+                  <a:srgbClr val="997929"/>
+                </a:solidFill>
+                <a:latin typeface="Times New Roman" pitchFamily="34" charset="0"/>
+                <a:ea typeface="Times New Roman" pitchFamily="34" charset="-122"/>
+                <a:cs typeface="Times New Roman" pitchFamily="34" charset="-120"/>
+              </a:rPr>
+              <a:t>Wrap-up</a:t>
+            </a:r>
+            <a:endParaRPr lang="en-US" sz="1800" dirty="0"/>
+          </a:p>
+        </p:txBody>
+      </p:sp>
+      <p:sp>
+        <p:nvSpPr>
+          <p:cNvPr id="4" name="Text 2"/>
+          <p:cNvSpPr/>
+          <p:nvPr/>
+        </p:nvSpPr>
+        <p:spPr>
+          <a:xfrm>
+            <a:off x="634901" y="883593"/>
+            <a:ext cx="8102798" cy="281880"/>
+          </a:xfrm>
+          <a:prstGeom prst="rect">
+            <a:avLst/>
+          </a:prstGeom>
+          <a:noFill/>
+          <a:ln/>
+        </p:spPr>
+        <p:txBody>
+          <a:bodyPr wrap="square" lIns="0" tIns="0" rIns="0" bIns="0" rtlCol="0" anchor="t"/>
+          <a:lstStyle/>
+          <a:p>
+            <a:pPr algn="l" marL="342900" indent="-342900">
+              <a:lnSpc>
+                <a:spcPts val="1620"/>
+              </a:lnSpc>
+              <a:spcAft>
+                <a:spcPts val="300"/>
+              </a:spcAft>
+              <a:buSzPct val="100000"/>
+              <a:buChar char="•"/>
+            </a:pPr>
+            <a:r>
+              <a:rPr lang="en-US" sz="1200" dirty="0">
+                <a:solidFill>
+                  <a:srgbClr val="1A1A1A"/>
+                </a:solidFill>
+                <a:latin typeface="Georgia" pitchFamily="34" charset="0"/>
+                <a:ea typeface="Georgia" pitchFamily="34" charset="-122"/>
+                <a:cs typeface="Georgia" pitchFamily="34" charset="-120"/>
+              </a:rPr>
+              <a:t>Preview Day 7: </a:t>
+            </a:r>
+            <a:pPr algn="l" indent="0" marL="0">
+              <a:lnSpc>
+                <a:spcPts val="1620"/>
+              </a:lnSpc>
+              <a:spcAft>
+                <a:spcPts val="300"/>
+              </a:spcAft>
+              <a:buNone/>
+            </a:pPr>
+            <a:r>
+              <a:rPr lang="en-US" sz="1200" i="1" dirty="0">
+                <a:solidFill>
+                  <a:srgbClr val="1A1A1A"/>
+                </a:solidFill>
+                <a:latin typeface="Georgia" pitchFamily="34" charset="0"/>
+                <a:ea typeface="Georgia" pitchFamily="34" charset="-122"/>
+                <a:cs typeface="Georgia" pitchFamily="34" charset="-120"/>
+              </a:rPr>
+              <a:t>"Tomorrow — structured debate. Pick your position."</a:t>
+            </a:r>
+            <a:endParaRPr lang="en-US" sz="1200" dirty="0"/>
+          </a:p>
+        </p:txBody>
+      </p:sp>
+      <p:sp>
+        <p:nvSpPr>
+          <p:cNvPr id="5" name="Text 3"/>
+          <p:cNvSpPr/>
+          <p:nvPr/>
+        </p:nvSpPr>
+        <p:spPr>
+          <a:xfrm>
+            <a:off x="406301" y="4434929"/>
+            <a:ext cx="8498026" cy="213271"/>
+          </a:xfrm>
+          <a:prstGeom prst="rect">
+            <a:avLst/>
+          </a:prstGeom>
+          <a:noFill/>
+          <a:ln/>
+        </p:spPr>
+        <p:txBody>
+          <a:bodyPr wrap="square" lIns="0" tIns="0" rIns="0" bIns="0" rtlCol="0" anchor="t"/>
+          <a:lstStyle/>
+          <a:p>
+            <a:pPr algn="l" indent="0" marL="0">
+              <a:lnSpc>
                 <a:spcPts val="1680"/>
               </a:lnSpc>
               <a:spcBef>
@@ -2179,6 +2706,450 @@
               <a:buNone/>
             </a:pPr>
             <a:r>
+              <a:rPr lang="en-US" sz="1200" dirty="0">
+                <a:solidFill>
+                  <a:srgbClr val="1A1A1A"/>
+                </a:solidFill>
+                <a:latin typeface="Georgia" pitchFamily="34" charset="0"/>
+                <a:ea typeface="Georgia" pitchFamily="34" charset="-122"/>
+                <a:cs typeface="Georgia" pitchFamily="34" charset="-120"/>
+              </a:rPr>
+              <a:t>Senior ·  · IKS Curriculum</a:t>
+            </a:r>
+            <a:endParaRPr lang="en-US" sz="1200" dirty="0"/>
+          </a:p>
+        </p:txBody>
+      </p:sp>
+    </p:spTree>
+  </p:cSld>
+  <p:clrMapOvr>
+    <a:masterClrMapping/>
+  </p:clrMapOvr>
+</p:sld>
+</file>
+
+<file path=ppt/slides/slide12.xml><?xml version="1.0" encoding="utf-8"?>
+<p:sld xmlns:a="http://schemas.openxmlformats.org/drawingml/2006/main" xmlns:r="http://schemas.openxmlformats.org/officeDocument/2006/relationships" xmlns:p="http://schemas.openxmlformats.org/presentationml/2006/main">
+  <p:cSld name="Slide 12">
+    <p:bg>
+      <p:bgPr>
+        <a:solidFill>
+          <a:srgbClr val="FAF7F2"/>
+        </a:solidFill>
+      </p:bgPr>
+    </p:bg>
+    <p:spTree>
+      <p:nvGrpSpPr>
+        <p:cNvPr id="1" name=""/>
+        <p:cNvGrpSpPr/>
+        <p:nvPr/>
+      </p:nvGrpSpPr>
+      <p:grpSpPr>
+        <a:xfrm>
+          <a:off x="0" y="0"/>
+          <a:ext cx="0" cy="0"/>
+          <a:chOff x="0" y="0"/>
+          <a:chExt cx="0" cy="0"/>
+        </a:xfrm>
+      </p:grpSpPr>
+      <p:sp>
+        <p:nvSpPr>
+          <p:cNvPr id="2" name="Text 0"/>
+          <p:cNvSpPr/>
+          <p:nvPr/>
+        </p:nvSpPr>
+        <p:spPr>
+          <a:xfrm>
+            <a:off x="0" y="0"/>
+            <a:ext cx="9144000" cy="101501"/>
+          </a:xfrm>
+          <a:prstGeom prst="rect">
+            <a:avLst/>
+          </a:prstGeom>
+          <a:solidFill>
+            <a:srgbClr val="5D1D2E"/>
+          </a:solidFill>
+          <a:ln/>
+        </p:spPr>
+        <p:txBody>
+          <a:bodyPr wrap="square" rtlCol="0" anchor="ctr"/>
+          <a:lstStyle/>
+          <a:p>
+            <a:pPr indent="0" marL="0">
+              <a:buNone/>
+            </a:pPr>
+            <a:endParaRPr lang="en-US" dirty="0"/>
+          </a:p>
+        </p:txBody>
+      </p:sp>
+      <p:sp>
+        <p:nvSpPr>
+          <p:cNvPr id="3" name="Text 1"/>
+          <p:cNvSpPr/>
+          <p:nvPr/>
+        </p:nvSpPr>
+        <p:spPr>
+          <a:xfrm>
+            <a:off x="406301" y="457051"/>
+            <a:ext cx="8498026" cy="274290"/>
+          </a:xfrm>
+          <a:prstGeom prst="rect">
+            <a:avLst/>
+          </a:prstGeom>
+          <a:noFill/>
+          <a:ln/>
+        </p:spPr>
+        <p:txBody>
+          <a:bodyPr wrap="square" lIns="0" tIns="0" rIns="0" bIns="0" rtlCol="0" anchor="t"/>
+          <a:lstStyle/>
+          <a:p>
+            <a:pPr algn="l" indent="0" marL="0">
+              <a:lnSpc>
+                <a:spcPts val="2160"/>
+              </a:lnSpc>
+              <a:spcBef>
+                <a:spcPts val="600"/>
+              </a:spcBef>
+              <a:spcAft>
+                <a:spcPts val="800"/>
+              </a:spcAft>
+              <a:buNone/>
+            </a:pPr>
+            <a:r>
+              <a:rPr lang="en-US" sz="1800" b="1" dirty="0">
+                <a:solidFill>
+                  <a:srgbClr val="997929"/>
+                </a:solidFill>
+                <a:latin typeface="Times New Roman" pitchFamily="34" charset="0"/>
+                <a:ea typeface="Times New Roman" pitchFamily="34" charset="-122"/>
+                <a:cs typeface="Times New Roman" pitchFamily="34" charset="-120"/>
+              </a:rPr>
+              <a:t>Differentiation</a:t>
+            </a:r>
+            <a:endParaRPr lang="en-US" sz="1800" dirty="0"/>
+          </a:p>
+        </p:txBody>
+      </p:sp>
+      <p:sp>
+        <p:nvSpPr>
+          <p:cNvPr id="4" name="Text 2"/>
+          <p:cNvSpPr/>
+          <p:nvPr/>
+        </p:nvSpPr>
+        <p:spPr>
+          <a:xfrm>
+            <a:off x="634901" y="883593"/>
+            <a:ext cx="8102798" cy="525661"/>
+          </a:xfrm>
+          <a:prstGeom prst="rect">
+            <a:avLst/>
+          </a:prstGeom>
+          <a:noFill/>
+          <a:ln/>
+        </p:spPr>
+        <p:txBody>
+          <a:bodyPr wrap="square" lIns="0" tIns="0" rIns="0" bIns="0" rtlCol="0" anchor="t"/>
+          <a:lstStyle/>
+          <a:p>
+            <a:pPr algn="l" marL="342900" indent="-342900">
+              <a:lnSpc>
+                <a:spcPts val="1620"/>
+              </a:lnSpc>
+              <a:spcAft>
+                <a:spcPts val="300"/>
+              </a:spcAft>
+              <a:buSzPct val="100000"/>
+              <a:buChar char="•"/>
+            </a:pPr>
+            <a:r>
+              <a:rPr lang="en-US" sz="1200" b="1" dirty="0">
+                <a:solidFill>
+                  <a:srgbClr val="1A1A1A"/>
+                </a:solidFill>
+                <a:latin typeface="Georgia" pitchFamily="34" charset="0"/>
+                <a:ea typeface="Georgia" pitchFamily="34" charset="-122"/>
+                <a:cs typeface="Georgia" pitchFamily="34" charset="-120"/>
+              </a:rPr>
+              <a:t>Tier up:</a:t>
+            </a:r>
+            <a:pPr algn="l" indent="0" marL="0">
+              <a:lnSpc>
+                <a:spcPts val="1620"/>
+              </a:lnSpc>
+              <a:spcAft>
+                <a:spcPts val="300"/>
+              </a:spcAft>
+              <a:buNone/>
+            </a:pPr>
+            <a:r>
+              <a:rPr lang="en-US" sz="1200" dirty="0">
+                <a:solidFill>
+                  <a:srgbClr val="1A1A1A"/>
+                </a:solidFill>
+                <a:latin typeface="Georgia" pitchFamily="34" charset="0"/>
+                <a:ea typeface="Georgia" pitchFamily="34" charset="-122"/>
+                <a:cs typeface="Georgia" pitchFamily="34" charset="-120"/>
+              </a:rPr>
+              <a:t> Read Plofker (2009) Ch. 1 too. Compare Plofker's broader history with Dani's specific critique.</a:t>
+            </a:r>
+            <a:endParaRPr lang="en-US" sz="1200" dirty="0"/>
+          </a:p>
+          <a:p>
+            <a:pPr algn="l" marL="342900" indent="-342900">
+              <a:lnSpc>
+                <a:spcPts val="1620"/>
+              </a:lnSpc>
+              <a:spcAft>
+                <a:spcPts val="300"/>
+              </a:spcAft>
+              <a:buSzPct val="100000"/>
+              <a:buChar char="•"/>
+            </a:pPr>
+            <a:r>
+              <a:rPr lang="en-US" sz="1200" b="1" dirty="0">
+                <a:solidFill>
+                  <a:srgbClr val="1A1A1A"/>
+                </a:solidFill>
+                <a:latin typeface="Georgia" pitchFamily="34" charset="0"/>
+                <a:ea typeface="Georgia" pitchFamily="34" charset="-122"/>
+                <a:cs typeface="Georgia" pitchFamily="34" charset="-120"/>
+              </a:rPr>
+              <a:t>Tier down:</a:t>
+            </a:r>
+            <a:pPr algn="l" indent="0" marL="0">
+              <a:lnSpc>
+                <a:spcPts val="1620"/>
+              </a:lnSpc>
+              <a:spcAft>
+                <a:spcPts val="300"/>
+              </a:spcAft>
+              <a:buNone/>
+            </a:pPr>
+            <a:r>
+              <a:rPr lang="en-US" sz="1200" dirty="0">
+                <a:solidFill>
+                  <a:srgbClr val="1A1A1A"/>
+                </a:solidFill>
+                <a:latin typeface="Georgia" pitchFamily="34" charset="0"/>
+                <a:ea typeface="Georgia" pitchFamily="34" charset="-122"/>
+                <a:cs typeface="Georgia" pitchFamily="34" charset="-120"/>
+              </a:rPr>
+              <a:t> Focus on Dani's three critiques as written; the synthesis reasoning is the goal.</a:t>
+            </a:r>
+            <a:endParaRPr lang="en-US" sz="1200" dirty="0"/>
+          </a:p>
+        </p:txBody>
+      </p:sp>
+      <p:sp>
+        <p:nvSpPr>
+          <p:cNvPr id="5" name="Text 3"/>
+          <p:cNvSpPr/>
+          <p:nvPr/>
+        </p:nvSpPr>
+        <p:spPr>
+          <a:xfrm>
+            <a:off x="406301" y="4434929"/>
+            <a:ext cx="8498026" cy="213271"/>
+          </a:xfrm>
+          <a:prstGeom prst="rect">
+            <a:avLst/>
+          </a:prstGeom>
+          <a:noFill/>
+          <a:ln/>
+        </p:spPr>
+        <p:txBody>
+          <a:bodyPr wrap="square" lIns="0" tIns="0" rIns="0" bIns="0" rtlCol="0" anchor="t"/>
+          <a:lstStyle/>
+          <a:p>
+            <a:pPr algn="l" indent="0" marL="0">
+              <a:lnSpc>
+                <a:spcPts val="1680"/>
+              </a:lnSpc>
+              <a:spcBef>
+                <a:spcPts val="300"/>
+              </a:spcBef>
+              <a:spcAft>
+                <a:spcPts val="300"/>
+              </a:spcAft>
+              <a:buNone/>
+            </a:pPr>
+            <a:r>
+              <a:rPr lang="en-US" sz="1200" dirty="0">
+                <a:solidFill>
+                  <a:srgbClr val="1A1A1A"/>
+                </a:solidFill>
+                <a:latin typeface="Georgia" pitchFamily="34" charset="0"/>
+                <a:ea typeface="Georgia" pitchFamily="34" charset="-122"/>
+                <a:cs typeface="Georgia" pitchFamily="34" charset="-120"/>
+              </a:rPr>
+              <a:t>Senior ·  · IKS Curriculum</a:t>
+            </a:r>
+            <a:endParaRPr lang="en-US" sz="1200" dirty="0"/>
+          </a:p>
+        </p:txBody>
+      </p:sp>
+    </p:spTree>
+  </p:cSld>
+  <p:clrMapOvr>
+    <a:masterClrMapping/>
+  </p:clrMapOvr>
+</p:sld>
+</file>
+
+<file path=ppt/slides/slide13.xml><?xml version="1.0" encoding="utf-8"?>
+<p:sld xmlns:a="http://schemas.openxmlformats.org/drawingml/2006/main" xmlns:r="http://schemas.openxmlformats.org/officeDocument/2006/relationships" xmlns:p="http://schemas.openxmlformats.org/presentationml/2006/main">
+  <p:cSld name="Slide 13">
+    <p:bg>
+      <p:bgPr>
+        <a:solidFill>
+          <a:srgbClr val="FAF7F2"/>
+        </a:solidFill>
+      </p:bgPr>
+    </p:bg>
+    <p:spTree>
+      <p:nvGrpSpPr>
+        <p:cNvPr id="1" name=""/>
+        <p:cNvGrpSpPr/>
+        <p:nvPr/>
+      </p:nvGrpSpPr>
+      <p:grpSpPr>
+        <a:xfrm>
+          <a:off x="0" y="0"/>
+          <a:ext cx="0" cy="0"/>
+          <a:chOff x="0" y="0"/>
+          <a:chExt cx="0" cy="0"/>
+        </a:xfrm>
+      </p:grpSpPr>
+      <p:sp>
+        <p:nvSpPr>
+          <p:cNvPr id="2" name="Text 0"/>
+          <p:cNvSpPr/>
+          <p:nvPr/>
+        </p:nvSpPr>
+        <p:spPr>
+          <a:xfrm>
+            <a:off x="0" y="0"/>
+            <a:ext cx="9144000" cy="101501"/>
+          </a:xfrm>
+          <a:prstGeom prst="rect">
+            <a:avLst/>
+          </a:prstGeom>
+          <a:solidFill>
+            <a:srgbClr val="5D1D2E"/>
+          </a:solidFill>
+          <a:ln/>
+        </p:spPr>
+        <p:txBody>
+          <a:bodyPr wrap="square" rtlCol="0" anchor="ctr"/>
+          <a:lstStyle/>
+          <a:p>
+            <a:pPr indent="0" marL="0">
+              <a:buNone/>
+            </a:pPr>
+            <a:endParaRPr lang="en-US" dirty="0"/>
+          </a:p>
+        </p:txBody>
+      </p:sp>
+      <p:sp>
+        <p:nvSpPr>
+          <p:cNvPr id="3" name="Text 1"/>
+          <p:cNvSpPr/>
+          <p:nvPr/>
+        </p:nvSpPr>
+        <p:spPr>
+          <a:xfrm>
+            <a:off x="406301" y="457051"/>
+            <a:ext cx="8498026" cy="274290"/>
+          </a:xfrm>
+          <a:prstGeom prst="rect">
+            <a:avLst/>
+          </a:prstGeom>
+          <a:noFill/>
+          <a:ln/>
+        </p:spPr>
+        <p:txBody>
+          <a:bodyPr wrap="square" lIns="0" tIns="0" rIns="0" bIns="0" rtlCol="0" anchor="t"/>
+          <a:lstStyle/>
+          <a:p>
+            <a:pPr algn="l" indent="0" marL="0">
+              <a:lnSpc>
+                <a:spcPts val="2160"/>
+              </a:lnSpc>
+              <a:spcBef>
+                <a:spcPts val="600"/>
+              </a:spcBef>
+              <a:spcAft>
+                <a:spcPts val="800"/>
+              </a:spcAft>
+              <a:buNone/>
+            </a:pPr>
+            <a:r>
+              <a:rPr lang="en-US" sz="1800" b="1" dirty="0">
+                <a:solidFill>
+                  <a:srgbClr val="997929"/>
+                </a:solidFill>
+                <a:latin typeface="Times New Roman" pitchFamily="34" charset="0"/>
+                <a:ea typeface="Times New Roman" pitchFamily="34" charset="-122"/>
+                <a:cs typeface="Times New Roman" pitchFamily="34" charset="-120"/>
+              </a:rPr>
+              <a:t>Teacher notes</a:t>
+            </a:r>
+            <a:endParaRPr lang="en-US" sz="1800" dirty="0"/>
+          </a:p>
+        </p:txBody>
+      </p:sp>
+      <p:sp>
+        <p:nvSpPr>
+          <p:cNvPr id="4" name="Text 2"/>
+          <p:cNvSpPr/>
+          <p:nvPr/>
+        </p:nvSpPr>
+        <p:spPr>
+          <a:xfrm>
+            <a:off x="634901" y="883593"/>
+            <a:ext cx="8102798" cy="731341"/>
+          </a:xfrm>
+          <a:prstGeom prst="rect">
+            <a:avLst/>
+          </a:prstGeom>
+          <a:noFill/>
+          <a:ln/>
+        </p:spPr>
+        <p:txBody>
+          <a:bodyPr wrap="square" lIns="0" tIns="0" rIns="0" bIns="0" rtlCol="0" anchor="t"/>
+          <a:lstStyle/>
+          <a:p>
+            <a:pPr algn="l" marL="342900" indent="-342900">
+              <a:lnSpc>
+                <a:spcPts val="1620"/>
+              </a:lnSpc>
+              <a:spcAft>
+                <a:spcPts val="300"/>
+              </a:spcAft>
+              <a:buSzPct val="100000"/>
+              <a:buChar char="•"/>
+            </a:pPr>
+            <a:r>
+              <a:rPr lang="en-US" sz="1200" dirty="0">
+                <a:solidFill>
+                  <a:srgbClr val="1A1A1A"/>
+                </a:solidFill>
+                <a:latin typeface="Georgia" pitchFamily="34" charset="0"/>
+                <a:ea typeface="Georgia" pitchFamily="34" charset="-122"/>
+                <a:cs typeface="Georgia" pitchFamily="34" charset="-120"/>
+              </a:rPr>
+              <a:t>Some students will react defensively to Dani's critique. Honour the reaction; don't dismiss it. Ask: </a:t>
+            </a:r>
+            <a:pPr algn="l" indent="0" marL="0">
+              <a:lnSpc>
+                <a:spcPts val="1620"/>
+              </a:lnSpc>
+              <a:spcAft>
+                <a:spcPts val="300"/>
+              </a:spcAft>
+              <a:buNone/>
+            </a:pPr>
+            <a:r>
               <a:rPr lang="en-US" sz="1200" i="1" dirty="0">
                 <a:solidFill>
                   <a:srgbClr val="1A1A1A"/>
@@ -2187,15 +3158,260 @@
                 <a:ea typeface="Georgia" pitchFamily="34" charset="-122"/>
                 <a:cs typeface="Georgia" pitchFamily="34" charset="-120"/>
               </a:rPr>
+              <a:t>"What is Dani's strongest claim? What's his weakest?"</a:t>
+            </a:r>
+            <a:endParaRPr lang="en-US" sz="1200" dirty="0"/>
+          </a:p>
+          <a:p>
+            <a:pPr algn="l" marL="342900" indent="-342900">
+              <a:lnSpc>
+                <a:spcPts val="1620"/>
+              </a:lnSpc>
+              <a:spcAft>
+                <a:spcPts val="300"/>
+              </a:spcAft>
+              <a:buSzPct val="100000"/>
+              <a:buChar char="•"/>
+            </a:pPr>
+            <a:r>
+              <a:rPr lang="en-US" sz="1200" dirty="0">
+                <a:solidFill>
+                  <a:srgbClr val="1A1A1A"/>
+                </a:solidFill>
+                <a:latin typeface="Georgia" pitchFamily="34" charset="0"/>
+                <a:ea typeface="Georgia" pitchFamily="34" charset="-122"/>
+                <a:cs typeface="Georgia" pitchFamily="34" charset="-120"/>
+              </a:rPr>
+              <a:t>Dani's tone is firm but not dismissive. Model that tone.</a:t>
+            </a:r>
+            <a:endParaRPr lang="en-US" sz="1200" dirty="0"/>
+          </a:p>
+        </p:txBody>
+      </p:sp>
+      <p:sp>
+        <p:nvSpPr>
+          <p:cNvPr id="5" name="Text 3"/>
+          <p:cNvSpPr/>
+          <p:nvPr/>
+        </p:nvSpPr>
+        <p:spPr>
+          <a:xfrm>
+            <a:off x="406301" y="4434929"/>
+            <a:ext cx="8498026" cy="213271"/>
+          </a:xfrm>
+          <a:prstGeom prst="rect">
+            <a:avLst/>
+          </a:prstGeom>
+          <a:noFill/>
+          <a:ln/>
+        </p:spPr>
+        <p:txBody>
+          <a:bodyPr wrap="square" lIns="0" tIns="0" rIns="0" bIns="0" rtlCol="0" anchor="t"/>
+          <a:lstStyle/>
+          <a:p>
+            <a:pPr algn="l" indent="0" marL="0">
+              <a:lnSpc>
+                <a:spcPts val="1680"/>
+              </a:lnSpc>
+              <a:spcBef>
+                <a:spcPts val="300"/>
+              </a:spcBef>
+              <a:spcAft>
+                <a:spcPts val="300"/>
+              </a:spcAft>
+              <a:buNone/>
+            </a:pPr>
+            <a:r>
+              <a:rPr lang="en-US" sz="1200" dirty="0">
+                <a:solidFill>
+                  <a:srgbClr val="1A1A1A"/>
+                </a:solidFill>
+                <a:latin typeface="Georgia" pitchFamily="34" charset="0"/>
+                <a:ea typeface="Georgia" pitchFamily="34" charset="-122"/>
+                <a:cs typeface="Georgia" pitchFamily="34" charset="-120"/>
+              </a:rPr>
+              <a:t>Senior ·  · IKS Curriculum</a:t>
+            </a:r>
+            <a:endParaRPr lang="en-US" sz="1200" dirty="0"/>
+          </a:p>
+        </p:txBody>
+      </p:sp>
+    </p:spTree>
+  </p:cSld>
+  <p:clrMapOvr>
+    <a:masterClrMapping/>
+  </p:clrMapOvr>
+</p:sld>
+</file>
+
+<file path=ppt/slides/slide14.xml><?xml version="1.0" encoding="utf-8"?>
+<p:sld xmlns:a="http://schemas.openxmlformats.org/drawingml/2006/main" xmlns:r="http://schemas.openxmlformats.org/officeDocument/2006/relationships" xmlns:p="http://schemas.openxmlformats.org/presentationml/2006/main">
+  <p:cSld name="Slide 14">
+    <p:bg>
+      <p:bgPr>
+        <a:solidFill>
+          <a:srgbClr val="FAF7F2"/>
+        </a:solidFill>
+      </p:bgPr>
+    </p:bg>
+    <p:spTree>
+      <p:nvGrpSpPr>
+        <p:cNvPr id="1" name=""/>
+        <p:cNvGrpSpPr/>
+        <p:nvPr/>
+      </p:nvGrpSpPr>
+      <p:grpSpPr>
+        <a:xfrm>
+          <a:off x="0" y="0"/>
+          <a:ext cx="0" cy="0"/>
+          <a:chOff x="0" y="0"/>
+          <a:chExt cx="0" cy="0"/>
+        </a:xfrm>
+      </p:grpSpPr>
+      <p:sp>
+        <p:nvSpPr>
+          <p:cNvPr id="2" name="Text 0"/>
+          <p:cNvSpPr/>
+          <p:nvPr/>
+        </p:nvSpPr>
+        <p:spPr>
+          <a:xfrm>
+            <a:off x="0" y="0"/>
+            <a:ext cx="9144000" cy="101501"/>
+          </a:xfrm>
+          <a:prstGeom prst="rect">
+            <a:avLst/>
+          </a:prstGeom>
+          <a:solidFill>
+            <a:srgbClr val="5D1D2E"/>
+          </a:solidFill>
+          <a:ln/>
+        </p:spPr>
+        <p:txBody>
+          <a:bodyPr wrap="square" rtlCol="0" anchor="ctr"/>
+          <a:lstStyle/>
+          <a:p>
+            <a:pPr indent="0" marL="0">
+              <a:buNone/>
+            </a:pPr>
+            <a:endParaRPr lang="en-US" dirty="0"/>
+          </a:p>
+        </p:txBody>
+      </p:sp>
+      <p:sp>
+        <p:nvSpPr>
+          <p:cNvPr id="3" name="Text 1"/>
+          <p:cNvSpPr/>
+          <p:nvPr/>
+        </p:nvSpPr>
+        <p:spPr>
+          <a:xfrm>
+            <a:off x="406301" y="457051"/>
+            <a:ext cx="8498026" cy="274290"/>
+          </a:xfrm>
+          <a:prstGeom prst="rect">
+            <a:avLst/>
+          </a:prstGeom>
+          <a:noFill/>
+          <a:ln/>
+        </p:spPr>
+        <p:txBody>
+          <a:bodyPr wrap="square" lIns="0" tIns="0" rIns="0" bIns="0" rtlCol="0" anchor="t"/>
+          <a:lstStyle/>
+          <a:p>
+            <a:pPr algn="l" indent="0" marL="0">
+              <a:lnSpc>
+                <a:spcPts val="2160"/>
+              </a:lnSpc>
+              <a:spcBef>
+                <a:spcPts val="600"/>
+              </a:spcBef>
+              <a:spcAft>
+                <a:spcPts val="800"/>
+              </a:spcAft>
+              <a:buNone/>
+            </a:pPr>
+            <a:r>
+              <a:rPr lang="en-US" sz="1800" b="1" dirty="0">
+                <a:solidFill>
+                  <a:srgbClr val="997929"/>
+                </a:solidFill>
+                <a:latin typeface="Times New Roman" pitchFamily="34" charset="0"/>
+                <a:ea typeface="Times New Roman" pitchFamily="34" charset="-122"/>
+                <a:cs typeface="Times New Roman" pitchFamily="34" charset="-120"/>
+              </a:rPr>
+              <a:t>Citation(s) used</a:t>
+            </a:r>
+            <a:endParaRPr lang="en-US" sz="1800" dirty="0"/>
+          </a:p>
+        </p:txBody>
+      </p:sp>
+      <p:sp>
+        <p:nvSpPr>
+          <p:cNvPr id="4" name="Text 2"/>
+          <p:cNvSpPr/>
+          <p:nvPr/>
+        </p:nvSpPr>
+        <p:spPr>
+          <a:xfrm>
+            <a:off x="634901" y="883593"/>
+            <a:ext cx="8102798" cy="281880"/>
+          </a:xfrm>
+          <a:prstGeom prst="rect">
+            <a:avLst/>
+          </a:prstGeom>
+          <a:noFill/>
+          <a:ln/>
+        </p:spPr>
+        <p:txBody>
+          <a:bodyPr wrap="square" lIns="0" tIns="0" rIns="0" bIns="0" rtlCol="0" anchor="t"/>
+          <a:lstStyle/>
+          <a:p>
+            <a:pPr algn="l" marL="342900" indent="-342900">
+              <a:lnSpc>
+                <a:spcPts val="1620"/>
+              </a:lnSpc>
+              <a:spcAft>
+                <a:spcPts val="300"/>
+              </a:spcAft>
+              <a:buSzPct val="100000"/>
+              <a:buChar char="•"/>
+            </a:pPr>
+            <a:r>
+              <a:rPr lang="en-US" sz="1200" dirty="0">
+                <a:solidFill>
+                  <a:srgbClr val="1A1A1A"/>
+                </a:solidFill>
+                <a:latin typeface="Georgia" pitchFamily="34" charset="0"/>
+                <a:ea typeface="Georgia" pitchFamily="34" charset="-122"/>
+                <a:cs typeface="Georgia" pitchFamily="34" charset="-120"/>
+              </a:rPr>
+              <a:t>Dani, S. G. (1993). "Myths and Reality: On Vedic Mathematics." </a:t>
+            </a:r>
+            <a:pPr algn="l" indent="0" marL="0">
+              <a:lnSpc>
+                <a:spcPts val="1620"/>
+              </a:lnSpc>
+              <a:spcAft>
+                <a:spcPts val="300"/>
+              </a:spcAft>
+              <a:buNone/>
+            </a:pPr>
+            <a:r>
+              <a:rPr lang="en-US" sz="1200" i="1" dirty="0">
+                <a:solidFill>
+                  <a:srgbClr val="1A1A1A"/>
+                </a:solidFill>
+                <a:latin typeface="Georgia" pitchFamily="34" charset="0"/>
+                <a:ea typeface="Georgia" pitchFamily="34" charset="-122"/>
+                <a:cs typeface="Georgia" pitchFamily="34" charset="-120"/>
+              </a:rPr>
               <a:t>Frontline</a:t>
             </a:r>
             <a:pPr algn="l" indent="0" marL="0">
               <a:lnSpc>
-                <a:spcPts val="1680"/>
-              </a:lnSpc>
-              <a:spcBef>
-                <a:spcPts val="300"/>
-              </a:spcBef>
+                <a:spcPts val="1620"/>
+              </a:lnSpc>
               <a:spcAft>
                 <a:spcPts val="300"/>
               </a:spcAft>
@@ -2214,11 +3430,8 @@
             </a:r>
             <a:pPr algn="l" indent="0" marL="0">
               <a:lnSpc>
-                <a:spcPts val="1680"/>
-              </a:lnSpc>
-              <a:spcBef>
-                <a:spcPts val="300"/>
-              </a:spcBef>
+                <a:spcPts val="1620"/>
+              </a:lnSpc>
               <a:spcAft>
                 <a:spcPts val="300"/>
               </a:spcAft>
@@ -2237,11 +3450,8 @@
             </a:r>
             <a:pPr algn="l" indent="0" marL="0">
               <a:lnSpc>
-                <a:spcPts val="1680"/>
-              </a:lnSpc>
-              <a:spcBef>
-                <a:spcPts val="300"/>
-              </a:spcBef>
+                <a:spcPts val="1620"/>
+              </a:lnSpc>
               <a:spcAft>
                 <a:spcPts val="300"/>
               </a:spcAft>
@@ -2414,7 +3624,7 @@
                 <a:ea typeface="Times New Roman" pitchFamily="34" charset="-122"/>
                 <a:cs typeface="Times New Roman" pitchFamily="34" charset="-120"/>
               </a:rPr>
-              <a:t>Materials</a:t>
+              <a:t>Learning objective</a:t>
             </a:r>
             <a:endParaRPr lang="en-US" sz="1800" dirty="0"/>
           </a:p>
@@ -2462,7 +3672,7 @@
                 <a:ea typeface="Georgia" pitchFamily="34" charset="-122"/>
                 <a:cs typeface="Georgia" pitchFamily="34" charset="-120"/>
               </a:rPr>
-              <a:t>– Printed copy of Dani (1993/2001) — full text or teacher-prepared synopsis – Tirthaji's preface (handout from Day 1) – Quiet reading time</a:t>
+              <a:t>Students read Dani's "Myths and Reality: On Vedic Mathematics" and identify Dani's three main critiques of Tirthaji's provenance claim.</a:t>
             </a:r>
             <a:endParaRPr lang="en-US" sz="1200" dirty="0"/>
           </a:p>
@@ -2620,7 +3830,7 @@
                 <a:ea typeface="Times New Roman" pitchFamily="34" charset="-122"/>
                 <a:cs typeface="Times New Roman" pitchFamily="34" charset="-120"/>
               </a:rPr>
-              <a:t>Flow</a:t>
+              <a:t>Materials</a:t>
             </a:r>
             <a:endParaRPr lang="en-US" sz="1800" dirty="0"/>
           </a:p>
@@ -2629,6 +3839,100 @@
       <p:sp>
         <p:nvSpPr>
           <p:cNvPr id="4" name="Text 2"/>
+          <p:cNvSpPr/>
+          <p:nvPr/>
+        </p:nvSpPr>
+        <p:spPr>
+          <a:xfrm>
+            <a:off x="634901" y="883593"/>
+            <a:ext cx="8102798" cy="769441"/>
+          </a:xfrm>
+          <a:prstGeom prst="rect">
+            <a:avLst/>
+          </a:prstGeom>
+          <a:noFill/>
+          <a:ln/>
+        </p:spPr>
+        <p:txBody>
+          <a:bodyPr wrap="square" lIns="0" tIns="0" rIns="0" bIns="0" rtlCol="0" anchor="t"/>
+          <a:lstStyle/>
+          <a:p>
+            <a:pPr algn="l" marL="342900" indent="-342900">
+              <a:lnSpc>
+                <a:spcPts val="1620"/>
+              </a:lnSpc>
+              <a:spcAft>
+                <a:spcPts val="300"/>
+              </a:spcAft>
+              <a:buSzPct val="100000"/>
+              <a:buChar char="•"/>
+            </a:pPr>
+            <a:r>
+              <a:rPr lang="en-US" sz="1200" dirty="0">
+                <a:solidFill>
+                  <a:srgbClr val="1A1A1A"/>
+                </a:solidFill>
+                <a:latin typeface="Georgia" pitchFamily="34" charset="0"/>
+                <a:ea typeface="Georgia" pitchFamily="34" charset="-122"/>
+                <a:cs typeface="Georgia" pitchFamily="34" charset="-120"/>
+              </a:rPr>
+              <a:t>Printed copy of Dani (1993/2001) — full text or teacher-prepared synopsis</a:t>
+            </a:r>
+            <a:endParaRPr lang="en-US" sz="1200" dirty="0"/>
+          </a:p>
+          <a:p>
+            <a:pPr algn="l" marL="342900" indent="-342900">
+              <a:lnSpc>
+                <a:spcPts val="1620"/>
+              </a:lnSpc>
+              <a:spcAft>
+                <a:spcPts val="300"/>
+              </a:spcAft>
+              <a:buSzPct val="100000"/>
+              <a:buChar char="•"/>
+            </a:pPr>
+            <a:r>
+              <a:rPr lang="en-US" sz="1200" dirty="0">
+                <a:solidFill>
+                  <a:srgbClr val="1A1A1A"/>
+                </a:solidFill>
+                <a:latin typeface="Georgia" pitchFamily="34" charset="0"/>
+                <a:ea typeface="Georgia" pitchFamily="34" charset="-122"/>
+                <a:cs typeface="Georgia" pitchFamily="34" charset="-120"/>
+              </a:rPr>
+              <a:t>Tirthaji's preface (handout from Day 1)</a:t>
+            </a:r>
+            <a:endParaRPr lang="en-US" sz="1200" dirty="0"/>
+          </a:p>
+          <a:p>
+            <a:pPr algn="l" marL="342900" indent="-342900">
+              <a:lnSpc>
+                <a:spcPts val="1620"/>
+              </a:lnSpc>
+              <a:spcAft>
+                <a:spcPts val="300"/>
+              </a:spcAft>
+              <a:buSzPct val="100000"/>
+              <a:buChar char="•"/>
+            </a:pPr>
+            <a:r>
+              <a:rPr lang="en-US" sz="1200" dirty="0">
+                <a:solidFill>
+                  <a:srgbClr val="1A1A1A"/>
+                </a:solidFill>
+                <a:latin typeface="Georgia" pitchFamily="34" charset="0"/>
+                <a:ea typeface="Georgia" pitchFamily="34" charset="-122"/>
+                <a:cs typeface="Georgia" pitchFamily="34" charset="-120"/>
+              </a:rPr>
+              <a:t>Quiet reading time</a:t>
+            </a:r>
+            <a:endParaRPr lang="en-US" sz="1200" dirty="0"/>
+          </a:p>
+        </p:txBody>
+      </p:sp>
+      <p:sp>
+        <p:nvSpPr>
+          <p:cNvPr id="5" name="Text 3"/>
           <p:cNvSpPr/>
           <p:nvPr/>
         </p:nvSpPr>
@@ -2778,7 +4082,7 @@
                 <a:ea typeface="Times New Roman" pitchFamily="34" charset="-122"/>
                 <a:cs typeface="Times New Roman" pitchFamily="34" charset="-120"/>
               </a:rPr>
-              <a:t>Warm-up (3 min)</a:t>
+              <a:t>Flow</a:t>
             </a:r>
             <a:endParaRPr lang="en-US" sz="1800" dirty="0"/>
           </a:p>
@@ -2787,52 +4091,6 @@
       <p:sp>
         <p:nvSpPr>
           <p:cNvPr id="4" name="Text 2"/>
-          <p:cNvSpPr/>
-          <p:nvPr/>
-        </p:nvSpPr>
-        <p:spPr>
-          <a:xfrm>
-            <a:off x="634901" y="883593"/>
-            <a:ext cx="8102798" cy="487561"/>
-          </a:xfrm>
-          <a:prstGeom prst="rect">
-            <a:avLst/>
-          </a:prstGeom>
-          <a:noFill/>
-          <a:ln/>
-        </p:spPr>
-        <p:txBody>
-          <a:bodyPr wrap="square" lIns="0" tIns="0" rIns="0" bIns="0" rtlCol="0" anchor="t"/>
-          <a:lstStyle/>
-          <a:p>
-            <a:pPr algn="l" marL="342900" indent="-342900">
-              <a:lnSpc>
-                <a:spcPts val="1620"/>
-              </a:lnSpc>
-              <a:spcAft>
-                <a:spcPts val="300"/>
-              </a:spcAft>
-              <a:buSzPct val="100000"/>
-              <a:buChar char="•"/>
-            </a:pPr>
-            <a:r>
-              <a:rPr lang="en-US" sz="1200" i="1" dirty="0">
-                <a:solidFill>
-                  <a:srgbClr val="1A1A1A"/>
-                </a:solidFill>
-                <a:latin typeface="Georgia" pitchFamily="34" charset="0"/>
-                <a:ea typeface="Georgia" pitchFamily="34" charset="-122"/>
-                <a:cs typeface="Georgia" pitchFamily="34" charset="-120"/>
-              </a:rPr>
-              <a:t>"Today: a scholarly reading. S. G. Dani is a respected mathematician at TIFR/IIT Bombay. He published this critique in 1993."</a:t>
-            </a:r>
-            <a:endParaRPr lang="en-US" sz="1200" dirty="0"/>
-          </a:p>
-        </p:txBody>
-      </p:sp>
-      <p:sp>
-        <p:nvSpPr>
-          <p:cNvPr id="5" name="Text 3"/>
           <p:cNvSpPr/>
           <p:nvPr/>
         </p:nvSpPr>
@@ -2982,7 +4240,7 @@
                 <a:ea typeface="Times New Roman" pitchFamily="34" charset="-122"/>
                 <a:cs typeface="Times New Roman" pitchFamily="34" charset="-120"/>
               </a:rPr>
-              <a:t>Reading (20 min)</a:t>
+              <a:t>Warm-up (3 min)</a:t>
             </a:r>
             <a:endParaRPr lang="en-US" sz="1800" dirty="0"/>
           </a:p>
@@ -2996,8 +4254,8 @@
         </p:nvSpPr>
         <p:spPr>
           <a:xfrm>
-            <a:off x="406301" y="870942"/>
-            <a:ext cx="8498026" cy="426541"/>
+            <a:off x="634901" y="883593"/>
+            <a:ext cx="8102798" cy="487561"/>
           </a:xfrm>
           <a:prstGeom prst="rect">
             <a:avLst/>
@@ -3009,28 +4267,26 @@
           <a:bodyPr wrap="square" lIns="0" tIns="0" rIns="0" bIns="0" rtlCol="0" anchor="t"/>
           <a:lstStyle/>
           <a:p>
-            <a:pPr algn="l" indent="0" marL="0">
-              <a:lnSpc>
-                <a:spcPts val="1680"/>
-              </a:lnSpc>
-              <a:spcBef>
-                <a:spcPts val="300"/>
-              </a:spcBef>
-              <a:spcAft>
-                <a:spcPts val="300"/>
-              </a:spcAft>
-              <a:buNone/>
-            </a:pPr>
-            <a:r>
-              <a:rPr lang="en-US" sz="1200" dirty="0">
-                <a:solidFill>
-                  <a:srgbClr val="1A1A1A"/>
-                </a:solidFill>
-                <a:latin typeface="Georgia" pitchFamily="34" charset="0"/>
-                <a:ea typeface="Georgia" pitchFamily="34" charset="-122"/>
-                <a:cs typeface="Georgia" pitchFamily="34" charset="-120"/>
-              </a:rPr>
-              <a:t>– 20 min silent reading of Dani (1993). – As they read, students note in their workbook:   – Dani's three main critiques (in their own words).   – One sentence from the text that struck them.   – One question they want to ask.</a:t>
+            <a:pPr algn="l" marL="342900" indent="-342900">
+              <a:lnSpc>
+                <a:spcPts val="1620"/>
+              </a:lnSpc>
+              <a:spcAft>
+                <a:spcPts val="300"/>
+              </a:spcAft>
+              <a:buSzPct val="100000"/>
+              <a:buChar char="•"/>
+            </a:pPr>
+            <a:r>
+              <a:rPr lang="en-US" sz="1200" i="1" dirty="0">
+                <a:solidFill>
+                  <a:srgbClr val="1A1A1A"/>
+                </a:solidFill>
+                <a:latin typeface="Georgia" pitchFamily="34" charset="0"/>
+                <a:ea typeface="Georgia" pitchFamily="34" charset="-122"/>
+                <a:cs typeface="Georgia" pitchFamily="34" charset="-120"/>
+              </a:rPr>
+              <a:t>"Today: a scholarly reading. S. G. Dani is a respected mathematician at TIFR/IIT Bombay. He published this critique in 1993."</a:t>
             </a:r>
             <a:endParaRPr lang="en-US" sz="1200" dirty="0"/>
           </a:p>
@@ -3188,7 +4444,7 @@
                 <a:ea typeface="Times New Roman" pitchFamily="34" charset="-122"/>
                 <a:cs typeface="Times New Roman" pitchFamily="34" charset="-120"/>
               </a:rPr>
-              <a:t>Reading response (7 min)</a:t>
+              <a:t>Reading (20 min)</a:t>
             </a:r>
             <a:endParaRPr lang="en-US" sz="1800" dirty="0"/>
           </a:p>
@@ -3202,8 +4458,8 @@
         </p:nvSpPr>
         <p:spPr>
           <a:xfrm>
-            <a:off x="406301" y="870942"/>
-            <a:ext cx="8498026" cy="426541"/>
+            <a:off x="634901" y="883593"/>
+            <a:ext cx="8102798" cy="1257002"/>
           </a:xfrm>
           <a:prstGeom prst="rect">
             <a:avLst/>
@@ -3215,17 +4471,15 @@
           <a:bodyPr wrap="square" lIns="0" tIns="0" rIns="0" bIns="0" rtlCol="0" anchor="t"/>
           <a:lstStyle/>
           <a:p>
-            <a:pPr algn="l" indent="0" marL="0">
-              <a:lnSpc>
-                <a:spcPts val="1680"/>
-              </a:lnSpc>
-              <a:spcBef>
-                <a:spcPts val="300"/>
-              </a:spcBef>
-              <a:spcAft>
-                <a:spcPts val="300"/>
-              </a:spcAft>
-              <a:buNone/>
+            <a:pPr algn="l" marL="342900" indent="-342900">
+              <a:lnSpc>
+                <a:spcPts val="1620"/>
+              </a:lnSpc>
+              <a:spcAft>
+                <a:spcPts val="300"/>
+              </a:spcAft>
+              <a:buSzPct val="100000"/>
+              <a:buChar char="•"/>
             </a:pPr>
             <a:r>
               <a:rPr lang="en-US" sz="1200" dirty="0">
@@ -3236,30 +4490,103 @@
                 <a:ea typeface="Georgia" pitchFamily="34" charset="-122"/>
                 <a:cs typeface="Georgia" pitchFamily="34" charset="-120"/>
               </a:rPr>
-              <a:t>– Each student writes 1 paragraph (4–5 sentences): </a:t>
-            </a:r>
-            <a:pPr algn="l" indent="0" marL="0">
-              <a:lnSpc>
-                <a:spcPts val="1680"/>
-              </a:lnSpc>
-              <a:spcBef>
-                <a:spcPts val="300"/>
-              </a:spcBef>
-              <a:spcAft>
-                <a:spcPts val="300"/>
-              </a:spcAft>
-              <a:buNone/>
-            </a:pPr>
-            <a:r>
-              <a:rPr lang="en-US" sz="1200" i="1" dirty="0">
-                <a:solidFill>
-                  <a:srgbClr val="1A1A1A"/>
-                </a:solidFill>
-                <a:latin typeface="Georgia" pitchFamily="34" charset="0"/>
-                <a:ea typeface="Georgia" pitchFamily="34" charset="-122"/>
-                <a:cs typeface="Georgia" pitchFamily="34" charset="-120"/>
-              </a:rPr>
-              <a:t>"What is your current best position on whether 'Vedic mathematics' is fairly named?"</a:t>
+              <a:t>20 min silent reading of Dani (1993).</a:t>
+            </a:r>
+            <a:endParaRPr lang="en-US" sz="1200" dirty="0"/>
+          </a:p>
+          <a:p>
+            <a:pPr algn="l" marL="342900" indent="-342900">
+              <a:lnSpc>
+                <a:spcPts val="1620"/>
+              </a:lnSpc>
+              <a:spcAft>
+                <a:spcPts val="300"/>
+              </a:spcAft>
+              <a:buSzPct val="100000"/>
+              <a:buChar char="•"/>
+            </a:pPr>
+            <a:r>
+              <a:rPr lang="en-US" sz="1200" dirty="0">
+                <a:solidFill>
+                  <a:srgbClr val="1A1A1A"/>
+                </a:solidFill>
+                <a:latin typeface="Georgia" pitchFamily="34" charset="0"/>
+                <a:ea typeface="Georgia" pitchFamily="34" charset="-122"/>
+                <a:cs typeface="Georgia" pitchFamily="34" charset="-120"/>
+              </a:rPr>
+              <a:t>As they read, students note in their workbook:</a:t>
+            </a:r>
+            <a:endParaRPr lang="en-US" sz="1200" dirty="0"/>
+          </a:p>
+          <a:p>
+            <a:pPr algn="l" marL="342900" indent="-342900">
+              <a:lnSpc>
+                <a:spcPts val="1620"/>
+              </a:lnSpc>
+              <a:spcAft>
+                <a:spcPts val="300"/>
+              </a:spcAft>
+              <a:buSzPct val="100000"/>
+              <a:buChar char="•"/>
+            </a:pPr>
+            <a:r>
+              <a:rPr lang="en-US" sz="1200" dirty="0">
+                <a:solidFill>
+                  <a:srgbClr val="1A1A1A"/>
+                </a:solidFill>
+                <a:latin typeface="Georgia" pitchFamily="34" charset="0"/>
+                <a:ea typeface="Georgia" pitchFamily="34" charset="-122"/>
+                <a:cs typeface="Georgia" pitchFamily="34" charset="-120"/>
+              </a:rPr>
+              <a:t>Dani's three main critiques (in their own words).</a:t>
+            </a:r>
+            <a:endParaRPr lang="en-US" sz="1200" dirty="0"/>
+          </a:p>
+          <a:p>
+            <a:pPr algn="l" marL="342900" indent="-342900">
+              <a:lnSpc>
+                <a:spcPts val="1620"/>
+              </a:lnSpc>
+              <a:spcAft>
+                <a:spcPts val="300"/>
+              </a:spcAft>
+              <a:buSzPct val="100000"/>
+              <a:buChar char="•"/>
+            </a:pPr>
+            <a:r>
+              <a:rPr lang="en-US" sz="1200" dirty="0">
+                <a:solidFill>
+                  <a:srgbClr val="1A1A1A"/>
+                </a:solidFill>
+                <a:latin typeface="Georgia" pitchFamily="34" charset="0"/>
+                <a:ea typeface="Georgia" pitchFamily="34" charset="-122"/>
+                <a:cs typeface="Georgia" pitchFamily="34" charset="-120"/>
+              </a:rPr>
+              <a:t>One sentence from the text that struck them.</a:t>
+            </a:r>
+            <a:endParaRPr lang="en-US" sz="1200" dirty="0"/>
+          </a:p>
+          <a:p>
+            <a:pPr algn="l" marL="342900" indent="-342900">
+              <a:lnSpc>
+                <a:spcPts val="1620"/>
+              </a:lnSpc>
+              <a:spcAft>
+                <a:spcPts val="300"/>
+              </a:spcAft>
+              <a:buSzPct val="100000"/>
+              <a:buChar char="•"/>
+            </a:pPr>
+            <a:r>
+              <a:rPr lang="en-US" sz="1200" dirty="0">
+                <a:solidFill>
+                  <a:srgbClr val="1A1A1A"/>
+                </a:solidFill>
+                <a:latin typeface="Georgia" pitchFamily="34" charset="0"/>
+                <a:ea typeface="Georgia" pitchFamily="34" charset="-122"/>
+                <a:cs typeface="Georgia" pitchFamily="34" charset="-120"/>
+              </a:rPr>
+              <a:t>One question they want to ask.</a:t>
             </a:r>
             <a:endParaRPr lang="en-US" sz="1200" dirty="0"/>
           </a:p>
@@ -3417,7 +4744,7 @@
                 <a:ea typeface="Times New Roman" pitchFamily="34" charset="-122"/>
                 <a:cs typeface="Times New Roman" pitchFamily="34" charset="-120"/>
               </a:rPr>
-              <a:t>Wrap-up</a:t>
+              <a:t>Discussion (15 min)</a:t>
             </a:r>
             <a:endParaRPr lang="en-US" sz="1800" dirty="0"/>
           </a:p>
@@ -3431,8 +4758,8 @@
         </p:nvSpPr>
         <p:spPr>
           <a:xfrm>
-            <a:off x="406301" y="870942"/>
-            <a:ext cx="8498026" cy="213271"/>
+            <a:off x="634901" y="883593"/>
+            <a:ext cx="8102798" cy="281880"/>
           </a:xfrm>
           <a:prstGeom prst="rect">
             <a:avLst/>
@@ -3444,13 +4771,31 @@
           <a:bodyPr wrap="square" lIns="0" tIns="0" rIns="0" bIns="0" rtlCol="0" anchor="t"/>
           <a:lstStyle/>
           <a:p>
+            <a:pPr algn="l" marL="342900" indent="-342900">
+              <a:lnSpc>
+                <a:spcPts val="1620"/>
+              </a:lnSpc>
+              <a:spcAft>
+                <a:spcPts val="300"/>
+              </a:spcAft>
+              <a:buSzPct val="100000"/>
+              <a:buChar char="•"/>
+            </a:pPr>
+            <a:r>
+              <a:rPr lang="en-US" sz="1200" b="1" dirty="0">
+                <a:solidFill>
+                  <a:srgbClr val="1A1A1A"/>
+                </a:solidFill>
+                <a:latin typeface="Georgia" pitchFamily="34" charset="0"/>
+                <a:ea typeface="Georgia" pitchFamily="34" charset="-122"/>
+                <a:cs typeface="Georgia" pitchFamily="34" charset="-120"/>
+              </a:rPr>
+              <a:t>Class compiles Dani's three main critiques</a:t>
+            </a:r>
             <a:pPr algn="l" indent="0" marL="0">
               <a:lnSpc>
-                <a:spcPts val="1680"/>
-              </a:lnSpc>
-              <a:spcBef>
-                <a:spcPts val="300"/>
-              </a:spcBef>
+                <a:spcPts val="1620"/>
+              </a:lnSpc>
               <a:spcAft>
                 <a:spcPts val="300"/>
               </a:spcAft>
@@ -3465,15 +4810,58 @@
                 <a:ea typeface="Georgia" pitchFamily="34" charset="-122"/>
                 <a:cs typeface="Georgia" pitchFamily="34" charset="-120"/>
               </a:rPr>
-              <a:t>– Preview Day 7: </a:t>
+              <a:t> on the board:</a:t>
+            </a:r>
+            <a:endParaRPr lang="en-US" sz="1200" dirty="0"/>
+          </a:p>
+        </p:txBody>
+      </p:sp>
+      <p:sp>
+        <p:nvSpPr>
+          <p:cNvPr id="5" name="Text 3"/>
+          <p:cNvSpPr/>
+          <p:nvPr/>
+        </p:nvSpPr>
+        <p:spPr>
+          <a:xfrm>
+            <a:off x="634901" y="1266974"/>
+            <a:ext cx="8102798" cy="975122"/>
+          </a:xfrm>
+          <a:prstGeom prst="rect">
+            <a:avLst/>
+          </a:prstGeom>
+          <a:noFill/>
+          <a:ln/>
+        </p:spPr>
+        <p:txBody>
+          <a:bodyPr wrap="square" lIns="0" tIns="0" rIns="0" bIns="0" rtlCol="0" anchor="t"/>
+          <a:lstStyle/>
+          <a:p>
+            <a:pPr algn="l" marL="342900" indent="-342900">
+              <a:lnSpc>
+                <a:spcPts val="1620"/>
+              </a:lnSpc>
+              <a:spcAft>
+                <a:spcPts val="300"/>
+              </a:spcAft>
+              <a:buSzPct val="100000"/>
+              <a:buChar char="•"/>
+            </a:pPr>
+            <a:r>
+              <a:rPr lang="en-US" sz="1200" dirty="0">
+                <a:solidFill>
+                  <a:srgbClr val="1A1A1A"/>
+                </a:solidFill>
+                <a:latin typeface="Georgia" pitchFamily="34" charset="0"/>
+                <a:ea typeface="Georgia" pitchFamily="34" charset="-122"/>
+                <a:cs typeface="Georgia" pitchFamily="34" charset="-120"/>
+              </a:rPr>
+              <a:t>No manuscript of the </a:t>
             </a:r>
             <a:pPr algn="l" indent="0" marL="0">
               <a:lnSpc>
-                <a:spcPts val="1680"/>
-              </a:lnSpc>
-              <a:spcBef>
-                <a:spcPts val="300"/>
-              </a:spcBef>
+                <a:spcPts val="1620"/>
+              </a:lnSpc>
               <a:spcAft>
                 <a:spcPts val="300"/>
               </a:spcAft>
@@ -3488,15 +4876,83 @@
                 <a:ea typeface="Georgia" pitchFamily="34" charset="-122"/>
                 <a:cs typeface="Georgia" pitchFamily="34" charset="-120"/>
               </a:rPr>
-              <a:t>"Tomorrow — structured debate. Pick your position."</a:t>
+              <a:t>Atharva-veda Pariśiṣṭa</a:t>
+            </a:r>
+            <a:pPr algn="l" indent="0" marL="0">
+              <a:lnSpc>
+                <a:spcPts val="1620"/>
+              </a:lnSpc>
+              <a:spcAft>
+                <a:spcPts val="300"/>
+              </a:spcAft>
+              <a:buNone/>
+            </a:pPr>
+            <a:r>
+              <a:rPr lang="en-US" sz="1200" dirty="0">
+                <a:solidFill>
+                  <a:srgbClr val="1A1A1A"/>
+                </a:solidFill>
+                <a:latin typeface="Georgia" pitchFamily="34" charset="0"/>
+                <a:ea typeface="Georgia" pitchFamily="34" charset="-122"/>
+                <a:cs typeface="Georgia" pitchFamily="34" charset="-120"/>
+              </a:rPr>
+              <a:t> containing these 16 sūtras has ever been produced.</a:t>
             </a:r>
             <a:endParaRPr lang="en-US" sz="1200" dirty="0"/>
           </a:p>
-        </p:txBody>
-      </p:sp>
-      <p:sp>
-        <p:nvSpPr>
-          <p:cNvPr id="5" name="Text 3"/>
+          <a:p>
+            <a:pPr algn="l" marL="342900" indent="-342900">
+              <a:lnSpc>
+                <a:spcPts val="1620"/>
+              </a:lnSpc>
+              <a:spcAft>
+                <a:spcPts val="300"/>
+              </a:spcAft>
+              <a:buSzPct val="100000"/>
+              <a:buChar char="•"/>
+            </a:pPr>
+            <a:r>
+              <a:rPr lang="en-US" sz="1200" dirty="0">
+                <a:solidFill>
+                  <a:srgbClr val="1A1A1A"/>
+                </a:solidFill>
+                <a:latin typeface="Georgia" pitchFamily="34" charset="0"/>
+                <a:ea typeface="Georgia" pitchFamily="34" charset="-122"/>
+                <a:cs typeface="Georgia" pitchFamily="34" charset="-120"/>
+              </a:rPr>
+              <a:t>The Sanskrit style of the sūtras (as Tirthaji presents them) is more recent than Vedic.</a:t>
+            </a:r>
+            <a:endParaRPr lang="en-US" sz="1200" dirty="0"/>
+          </a:p>
+          <a:p>
+            <a:pPr algn="l" marL="342900" indent="-342900">
+              <a:lnSpc>
+                <a:spcPts val="1620"/>
+              </a:lnSpc>
+              <a:spcAft>
+                <a:spcPts val="300"/>
+              </a:spcAft>
+              <a:buSzPct val="100000"/>
+              <a:buChar char="•"/>
+            </a:pPr>
+            <a:r>
+              <a:rPr lang="en-US" sz="1200" dirty="0">
+                <a:solidFill>
+                  <a:srgbClr val="1A1A1A"/>
+                </a:solidFill>
+                <a:latin typeface="Georgia" pitchFamily="34" charset="0"/>
+                <a:ea typeface="Georgia" pitchFamily="34" charset="-122"/>
+                <a:cs typeface="Georgia" pitchFamily="34" charset="-120"/>
+              </a:rPr>
+              <a:t>The mathematical techniques have 19th–early-20th-century European parallels (Trachtenberg etc.); calling them "Vedic" overstates the cultural specificity.</a:t>
+            </a:r>
+            <a:endParaRPr lang="en-US" sz="1200" dirty="0"/>
+          </a:p>
+        </p:txBody>
+      </p:sp>
+      <p:sp>
+        <p:nvSpPr>
+          <p:cNvPr id="6" name="Text 4"/>
           <p:cNvSpPr/>
           <p:nvPr/>
         </p:nvSpPr>
@@ -3646,7 +5102,7 @@
                 <a:ea typeface="Times New Roman" pitchFamily="34" charset="-122"/>
                 <a:cs typeface="Times New Roman" pitchFamily="34" charset="-120"/>
               </a:rPr>
-              <a:t>Differentiation</a:t>
+              <a:t>Discussion (15 min) (cont.)</a:t>
             </a:r>
             <a:endParaRPr lang="en-US" sz="1800" dirty="0"/>
           </a:p>
@@ -3661,7 +5117,7 @@
         <p:spPr>
           <a:xfrm>
             <a:off x="634901" y="883593"/>
-            <a:ext cx="8102798" cy="525661"/>
+            <a:ext cx="8102798" cy="281880"/>
           </a:xfrm>
           <a:prstGeom prst="rect">
             <a:avLst/>
@@ -3692,30 +5148,32 @@
                 <a:ea typeface="Georgia" pitchFamily="34" charset="-122"/>
                 <a:cs typeface="Georgia" pitchFamily="34" charset="-120"/>
               </a:rPr>
-              <a:t>Tier up:</a:t>
-            </a:r>
-            <a:pPr algn="l" indent="0" marL="0">
-              <a:lnSpc>
-                <a:spcPts val="1620"/>
-              </a:lnSpc>
-              <a:spcAft>
-                <a:spcPts val="300"/>
-              </a:spcAft>
-              <a:buNone/>
-            </a:pPr>
-            <a:r>
-              <a:rPr lang="en-US" sz="1200" dirty="0">
-                <a:solidFill>
-                  <a:srgbClr val="1A1A1A"/>
-                </a:solidFill>
-                <a:latin typeface="Georgia" pitchFamily="34" charset="0"/>
-                <a:ea typeface="Georgia" pitchFamily="34" charset="-122"/>
-                <a:cs typeface="Georgia" pitchFamily="34" charset="-120"/>
-              </a:rPr>
-              <a:t> Read Plofker (2009) Ch. 1 too. Compare Plofker's broader history with Dani's specific critique.</a:t>
+              <a:t>Discuss:</a:t>
             </a:r>
             <a:endParaRPr lang="en-US" sz="1200" dirty="0"/>
           </a:p>
+        </p:txBody>
+      </p:sp>
+      <p:sp>
+        <p:nvSpPr>
+          <p:cNvPr id="5" name="Text 3"/>
+          <p:cNvSpPr/>
+          <p:nvPr/>
+        </p:nvSpPr>
+        <p:spPr>
+          <a:xfrm>
+            <a:off x="634901" y="1266974"/>
+            <a:ext cx="8102798" cy="769441"/>
+          </a:xfrm>
+          <a:prstGeom prst="rect">
+            <a:avLst/>
+          </a:prstGeom>
+          <a:noFill/>
+          <a:ln/>
+        </p:spPr>
+        <p:txBody>
+          <a:bodyPr wrap="square" lIns="0" tIns="0" rIns="0" bIns="0" rtlCol="0" anchor="t"/>
+          <a:lstStyle/>
           <a:p>
             <a:pPr algn="l" marL="342900" indent="-342900">
               <a:lnSpc>
@@ -3728,15 +5186,15 @@
               <a:buChar char="•"/>
             </a:pPr>
             <a:r>
-              <a:rPr lang="en-US" sz="1200" b="1" dirty="0">
-                <a:solidFill>
-                  <a:srgbClr val="1A1A1A"/>
-                </a:solidFill>
-                <a:latin typeface="Georgia" pitchFamily="34" charset="0"/>
-                <a:ea typeface="Georgia" pitchFamily="34" charset="-122"/>
-                <a:cs typeface="Georgia" pitchFamily="34" charset="-120"/>
-              </a:rPr>
-              <a:t>Tier down:</a:t>
+              <a:rPr lang="en-US" sz="1200" dirty="0">
+                <a:solidFill>
+                  <a:srgbClr val="1A1A1A"/>
+                </a:solidFill>
+                <a:latin typeface="Georgia" pitchFamily="34" charset="0"/>
+                <a:ea typeface="Georgia" pitchFamily="34" charset="-122"/>
+                <a:cs typeface="Georgia" pitchFamily="34" charset="-120"/>
+              </a:rPr>
+              <a:t>Are these critiques </a:t>
             </a:r>
             <a:pPr algn="l" indent="0" marL="0">
               <a:lnSpc>
@@ -3748,6 +5206,26 @@
               <a:buNone/>
             </a:pPr>
             <a:r>
+              <a:rPr lang="en-US" sz="1200" i="1" dirty="0">
+                <a:solidFill>
+                  <a:srgbClr val="1A1A1A"/>
+                </a:solidFill>
+                <a:latin typeface="Georgia" pitchFamily="34" charset="0"/>
+                <a:ea typeface="Georgia" pitchFamily="34" charset="-122"/>
+                <a:cs typeface="Georgia" pitchFamily="34" charset="-120"/>
+              </a:rPr>
+              <a:t>fair</a:t>
+            </a:r>
+            <a:pPr algn="l" indent="0" marL="0">
+              <a:lnSpc>
+                <a:spcPts val="1620"/>
+              </a:lnSpc>
+              <a:spcAft>
+                <a:spcPts val="300"/>
+              </a:spcAft>
+              <a:buNone/>
+            </a:pPr>
+            <a:r>
               <a:rPr lang="en-US" sz="1200" dirty="0">
                 <a:solidFill>
                   <a:srgbClr val="1A1A1A"/>
@@ -3756,15 +5234,63 @@
                 <a:ea typeface="Georgia" pitchFamily="34" charset="-122"/>
                 <a:cs typeface="Georgia" pitchFamily="34" charset="-120"/>
               </a:rPr>
-              <a:t> Focus on Dani's three critiques as written; the synthesis reasoning is the goal.</a:t>
+              <a:t>? Does Dani steel-man Tirthaji?</a:t>
             </a:r>
             <a:endParaRPr lang="en-US" sz="1200" dirty="0"/>
           </a:p>
-        </p:txBody>
-      </p:sp>
-      <p:sp>
-        <p:nvSpPr>
-          <p:cNvPr id="5" name="Text 3"/>
+          <a:p>
+            <a:pPr algn="l" marL="342900" indent="-342900">
+              <a:lnSpc>
+                <a:spcPts val="1620"/>
+              </a:lnSpc>
+              <a:spcAft>
+                <a:spcPts val="300"/>
+              </a:spcAft>
+              <a:buSzPct val="100000"/>
+              <a:buChar char="•"/>
+            </a:pPr>
+            <a:r>
+              <a:rPr lang="en-US" sz="1200" dirty="0">
+                <a:solidFill>
+                  <a:srgbClr val="1A1A1A"/>
+                </a:solidFill>
+                <a:latin typeface="Georgia" pitchFamily="34" charset="0"/>
+                <a:ea typeface="Georgia" pitchFamily="34" charset="-122"/>
+                <a:cs typeface="Georgia" pitchFamily="34" charset="-120"/>
+              </a:rPr>
+              <a:t>Does the absence of a manuscript = absence of the tradition?</a:t>
+            </a:r>
+            <a:endParaRPr lang="en-US" sz="1200" dirty="0"/>
+          </a:p>
+          <a:p>
+            <a:pPr algn="l" marL="342900" indent="-342900">
+              <a:lnSpc>
+                <a:spcPts val="1620"/>
+              </a:lnSpc>
+              <a:spcAft>
+                <a:spcPts val="300"/>
+              </a:spcAft>
+              <a:buSzPct val="100000"/>
+              <a:buChar char="•"/>
+            </a:pPr>
+            <a:r>
+              <a:rPr lang="en-US" sz="1200" dirty="0">
+                <a:solidFill>
+                  <a:srgbClr val="1A1A1A"/>
+                </a:solidFill>
+                <a:latin typeface="Georgia" pitchFamily="34" charset="0"/>
+                <a:ea typeface="Georgia" pitchFamily="34" charset="-122"/>
+                <a:cs typeface="Georgia" pitchFamily="34" charset="-120"/>
+              </a:rPr>
+              <a:t>If the sūtras are 20th-century, does that diminish their value?</a:t>
+            </a:r>
+            <a:endParaRPr lang="en-US" sz="1200" dirty="0"/>
+          </a:p>
+        </p:txBody>
+      </p:sp>
+      <p:sp>
+        <p:nvSpPr>
+          <p:cNvPr id="6" name="Text 4"/>
           <p:cNvSpPr/>
           <p:nvPr/>
         </p:nvSpPr>
@@ -3914,7 +5440,7 @@
                 <a:ea typeface="Times New Roman" pitchFamily="34" charset="-122"/>
                 <a:cs typeface="Times New Roman" pitchFamily="34" charset="-120"/>
               </a:rPr>
-              <a:t>Teacher notes</a:t>
+              <a:t>Discussion (15 min) (cont.)</a:t>
             </a:r>
             <a:endParaRPr lang="en-US" sz="1800" dirty="0"/>
           </a:p>
@@ -3928,8 +5454,8 @@
         </p:nvSpPr>
         <p:spPr>
           <a:xfrm>
-            <a:off x="406301" y="870942"/>
-            <a:ext cx="8498026" cy="426541"/>
+            <a:off x="634901" y="883593"/>
+            <a:ext cx="8102798" cy="281880"/>
           </a:xfrm>
           <a:prstGeom prst="rect">
             <a:avLst/>
@@ -3941,13 +5467,97 @@
           <a:bodyPr wrap="square" lIns="0" tIns="0" rIns="0" bIns="0" rtlCol="0" anchor="t"/>
           <a:lstStyle/>
           <a:p>
+            <a:pPr algn="l" marL="342900" indent="-342900">
+              <a:lnSpc>
+                <a:spcPts val="1620"/>
+              </a:lnSpc>
+              <a:spcAft>
+                <a:spcPts val="300"/>
+              </a:spcAft>
+              <a:buSzPct val="100000"/>
+              <a:buChar char="•"/>
+            </a:pPr>
+            <a:r>
+              <a:rPr lang="en-US" sz="1200" b="1" dirty="0">
+                <a:solidFill>
+                  <a:srgbClr val="1A1A1A"/>
+                </a:solidFill>
+                <a:latin typeface="Georgia" pitchFamily="34" charset="0"/>
+                <a:ea typeface="Georgia" pitchFamily="34" charset="-122"/>
+                <a:cs typeface="Georgia" pitchFamily="34" charset="-120"/>
+              </a:rPr>
+              <a:t>Frame the path forward:</a:t>
+            </a:r>
+            <a:endParaRPr lang="en-US" sz="1200" dirty="0"/>
+          </a:p>
+        </p:txBody>
+      </p:sp>
+      <p:sp>
+        <p:nvSpPr>
+          <p:cNvPr id="5" name="Text 3"/>
+          <p:cNvSpPr/>
+          <p:nvPr/>
+        </p:nvSpPr>
+        <p:spPr>
+          <a:xfrm>
+            <a:off x="634901" y="1266974"/>
+            <a:ext cx="8102798" cy="487561"/>
+          </a:xfrm>
+          <a:prstGeom prst="rect">
+            <a:avLst/>
+          </a:prstGeom>
+          <a:noFill/>
+          <a:ln/>
+        </p:spPr>
+        <p:txBody>
+          <a:bodyPr wrap="square" lIns="0" tIns="0" rIns="0" bIns="0" rtlCol="0" anchor="t"/>
+          <a:lstStyle/>
+          <a:p>
+            <a:pPr algn="l" marL="342900" indent="-342900">
+              <a:lnSpc>
+                <a:spcPts val="1620"/>
+              </a:lnSpc>
+              <a:spcAft>
+                <a:spcPts val="300"/>
+              </a:spcAft>
+              <a:buSzPct val="100000"/>
+              <a:buChar char="•"/>
+            </a:pPr>
+            <a:r>
+              <a:rPr lang="en-US" sz="1200" dirty="0">
+                <a:solidFill>
+                  <a:srgbClr val="1A1A1A"/>
+                </a:solidFill>
+                <a:latin typeface="Georgia" pitchFamily="34" charset="0"/>
+                <a:ea typeface="Georgia" pitchFamily="34" charset="-122"/>
+                <a:cs typeface="Georgia" pitchFamily="34" charset="-120"/>
+              </a:rPr>
+              <a:t>"The sūtras might NOT be Vedic AND might still be a real Indian intellectual achievement. The two are not in opposition. Tirthaji's achievement is the </a:t>
+            </a:r>
             <a:pPr algn="l" indent="0" marL="0">
               <a:lnSpc>
-                <a:spcPts val="1680"/>
-              </a:lnSpc>
-              <a:spcBef>
-                <a:spcPts val="300"/>
-              </a:spcBef>
+                <a:spcPts val="1620"/>
+              </a:lnSpc>
+              <a:spcAft>
+                <a:spcPts val="300"/>
+              </a:spcAft>
+              <a:buNone/>
+            </a:pPr>
+            <a:r>
+              <a:rPr lang="en-US" sz="1200" i="1" dirty="0">
+                <a:solidFill>
+                  <a:srgbClr val="1A1A1A"/>
+                </a:solidFill>
+                <a:latin typeface="Georgia" pitchFamily="34" charset="0"/>
+                <a:ea typeface="Georgia" pitchFamily="34" charset="-122"/>
+                <a:cs typeface="Georgia" pitchFamily="34" charset="-120"/>
+              </a:rPr>
+              <a:t>synthesis and codification</a:t>
+            </a:r>
+            <a:pPr algn="l" indent="0" marL="0">
+              <a:lnSpc>
+                <a:spcPts val="1620"/>
+              </a:lnSpc>
               <a:spcAft>
                 <a:spcPts val="300"/>
               </a:spcAft>
@@ -3962,15 +5572,12 @@
                 <a:ea typeface="Georgia" pitchFamily="34" charset="-122"/>
                 <a:cs typeface="Georgia" pitchFamily="34" charset="-120"/>
               </a:rPr>
-              <a:t>– Some students will react defensively to Dani's critique. Honour the reaction; don't dismiss it. Ask: </a:t>
+              <a:t>, even if the </a:t>
             </a:r>
             <a:pPr algn="l" indent="0" marL="0">
               <a:lnSpc>
-                <a:spcPts val="1680"/>
-              </a:lnSpc>
-              <a:spcBef>
-                <a:spcPts val="300"/>
-              </a:spcBef>
+                <a:spcPts val="1620"/>
+              </a:lnSpc>
               <a:spcAft>
                 <a:spcPts val="300"/>
               </a:spcAft>
@@ -3985,15 +5592,12 @@
                 <a:ea typeface="Georgia" pitchFamily="34" charset="-122"/>
                 <a:cs typeface="Georgia" pitchFamily="34" charset="-120"/>
               </a:rPr>
-              <a:t>"What is Dani's strongest claim? What's his weakest?"</a:t>
+              <a:t>attribution</a:t>
             </a:r>
             <a:pPr algn="l" indent="0" marL="0">
               <a:lnSpc>
-                <a:spcPts val="1680"/>
-              </a:lnSpc>
-              <a:spcBef>
-                <a:spcPts val="300"/>
-              </a:spcBef>
+                <a:spcPts val="1620"/>
+              </a:lnSpc>
               <a:spcAft>
                 <a:spcPts val="300"/>
               </a:spcAft>
@@ -4008,7 +5612,7 @@
                 <a:ea typeface="Georgia" pitchFamily="34" charset="-122"/>
                 <a:cs typeface="Georgia" pitchFamily="34" charset="-120"/>
               </a:rPr>
-              <a:t> – Dani's tone is firm but not dismissive. Model that tone.</a:t>
+              <a:t> doesn't survive scrutiny."</a:t>
             </a:r>
             <a:endParaRPr lang="en-US" sz="1200" dirty="0"/>
           </a:p>
@@ -4016,7 +5620,7 @@
       </p:sp>
       <p:sp>
         <p:nvSpPr>
-          <p:cNvPr id="5" name="Text 3"/>
+          <p:cNvPr id="6" name="Text 4"/>
           <p:cNvSpPr/>
           <p:nvPr/>
         </p:nvSpPr>
